--- a/exports/pptx/lessons/middle-module-06-moon-phases-tithi/day-08-project-session-1.pptx
+++ b/exports/pptx/lessons/middle-module-06-moon-phases-tithi/day-08-project-session-1.pptx
@@ -17,9 +17,15 @@
     <p:sldId id="265" r:id="rId11"/>
     <p:sldId id="266" r:id="rId12"/>
     <p:sldId id="267" r:id="rId13"/>
+    <p:sldId id="268" r:id="rId14"/>
+    <p:sldId id="269" r:id="rId15"/>
+    <p:sldId id="270" r:id="rId16"/>
+    <p:sldId id="271" r:id="rId17"/>
+    <p:sldId id="272" r:id="rId18"/>
+    <p:sldId id="273" r:id="rId19"/>
   </p:sldIdLst>
   <p:notesMasterIdLst>
-    <p:notesMasterId r:id="rId14"/>
+    <p:notesMasterId r:id="rId20"/>
   </p:notesMasterIdLst>
   <p:sldSz cx="9144000" cy="5143500"/>
   <p:notesSz cx="5143500" cy="9144000"/>
@@ -801,6 +807,534 @@
             <a:fld id="{F7021451-1387-4CA6-816F-3879F97B5CBC}" type="slidenum">
               <a:rPr lang="en-US"/>
               <a:t>12</a:t>
+            </a:fld>
+            <a:endParaRPr lang="en-US"/>
+          </a:p>
+        </p:txBody>
+      </p:sp>
+    </p:spTree>
+    <p:extLst>
+      <p:ext uri="{BB962C8B-B14F-4D97-AF65-F5344CB8AC3E}">
+        <p14:creationId xmlns:p14="http://schemas.microsoft.com/office/powerpoint/2010/main" val="1024086991"/>
+      </p:ext>
+    </p:extLst>
+  </p:cSld>
+  <p:clrMapOvr>
+    <a:masterClrMapping/>
+  </p:clrMapOvr>
+</p:notes>
+</file>
+
+<file path=ppt/notesSlides/notesSlide13.xml><?xml version="1.0" encoding="utf-8"?>
+<p:notes xmlns:a="http://schemas.openxmlformats.org/drawingml/2006/main" xmlns:r="http://schemas.openxmlformats.org/officeDocument/2006/relationships" xmlns:p="http://schemas.openxmlformats.org/presentationml/2006/main">
+  <p:cSld>
+    <p:spTree>
+      <p:nvGrpSpPr>
+        <p:cNvPr id="1" name=""/>
+        <p:cNvGrpSpPr/>
+        <p:nvPr/>
+      </p:nvGrpSpPr>
+      <p:grpSpPr>
+        <a:xfrm>
+          <a:off x="0" y="0"/>
+          <a:ext cx="0" cy="0"/>
+          <a:chOff x="0" y="0"/>
+          <a:chExt cx="0" cy="0"/>
+        </a:xfrm>
+      </p:grpSpPr>
+      <p:sp>
+        <p:nvSpPr>
+          <p:cNvPr id="2" name="Slide Image Placeholder 1"/>
+          <p:cNvSpPr>
+            <a:spLocks noGrp="1" noRot="1" noChangeAspect="1"/>
+          </p:cNvSpPr>
+          <p:nvPr>
+            <p:ph type="sldImg"/>
+          </p:nvPr>
+        </p:nvSpPr>
+        <p:spPr/>
+      </p:sp>
+      <p:sp>
+        <p:nvSpPr>
+          <p:cNvPr id="3" name="Notes Placeholder 2"/>
+          <p:cNvSpPr>
+            <a:spLocks noGrp="1"/>
+          </p:cNvSpPr>
+          <p:nvPr>
+            <p:ph type="body" idx="1"/>
+          </p:nvPr>
+        </p:nvSpPr>
+        <p:spPr/>
+        <p:txBody>
+          <a:bodyPr/>
+          <a:lstStyle/>
+          <a:p>
+            <a:r>
+              <a:rPr lang="en-US" dirty="0"/>
+              <a:t/>
+            </a:r>
+            <a:endParaRPr lang="en-US" dirty="0"/>
+          </a:p>
+        </p:txBody>
+      </p:sp>
+      <p:sp>
+        <p:nvSpPr>
+          <p:cNvPr id="4" name="Slide Number Placeholder 3"/>
+          <p:cNvSpPr>
+            <a:spLocks noGrp="1"/>
+          </p:cNvSpPr>
+          <p:nvPr>
+            <p:ph type="sldNum" sz="quarter" idx="10"/>
+          </p:nvPr>
+        </p:nvSpPr>
+        <p:spPr/>
+        <p:txBody>
+          <a:bodyPr/>
+          <a:lstStyle/>
+          <a:p>
+            <a:fld id="{F7021451-1387-4CA6-816F-3879F97B5CBC}" type="slidenum">
+              <a:rPr lang="en-US"/>
+              <a:t>13</a:t>
+            </a:fld>
+            <a:endParaRPr lang="en-US"/>
+          </a:p>
+        </p:txBody>
+      </p:sp>
+    </p:spTree>
+    <p:extLst>
+      <p:ext uri="{BB962C8B-B14F-4D97-AF65-F5344CB8AC3E}">
+        <p14:creationId xmlns:p14="http://schemas.microsoft.com/office/powerpoint/2010/main" val="1024086991"/>
+      </p:ext>
+    </p:extLst>
+  </p:cSld>
+  <p:clrMapOvr>
+    <a:masterClrMapping/>
+  </p:clrMapOvr>
+</p:notes>
+</file>
+
+<file path=ppt/notesSlides/notesSlide14.xml><?xml version="1.0" encoding="utf-8"?>
+<p:notes xmlns:a="http://schemas.openxmlformats.org/drawingml/2006/main" xmlns:r="http://schemas.openxmlformats.org/officeDocument/2006/relationships" xmlns:p="http://schemas.openxmlformats.org/presentationml/2006/main">
+  <p:cSld>
+    <p:spTree>
+      <p:nvGrpSpPr>
+        <p:cNvPr id="1" name=""/>
+        <p:cNvGrpSpPr/>
+        <p:nvPr/>
+      </p:nvGrpSpPr>
+      <p:grpSpPr>
+        <a:xfrm>
+          <a:off x="0" y="0"/>
+          <a:ext cx="0" cy="0"/>
+          <a:chOff x="0" y="0"/>
+          <a:chExt cx="0" cy="0"/>
+        </a:xfrm>
+      </p:grpSpPr>
+      <p:sp>
+        <p:nvSpPr>
+          <p:cNvPr id="2" name="Slide Image Placeholder 1"/>
+          <p:cNvSpPr>
+            <a:spLocks noGrp="1" noRot="1" noChangeAspect="1"/>
+          </p:cNvSpPr>
+          <p:nvPr>
+            <p:ph type="sldImg"/>
+          </p:nvPr>
+        </p:nvSpPr>
+        <p:spPr/>
+      </p:sp>
+      <p:sp>
+        <p:nvSpPr>
+          <p:cNvPr id="3" name="Notes Placeholder 2"/>
+          <p:cNvSpPr>
+            <a:spLocks noGrp="1"/>
+          </p:cNvSpPr>
+          <p:nvPr>
+            <p:ph type="body" idx="1"/>
+          </p:nvPr>
+        </p:nvSpPr>
+        <p:spPr/>
+        <p:txBody>
+          <a:bodyPr/>
+          <a:lstStyle/>
+          <a:p>
+            <a:r>
+              <a:rPr lang="en-US" dirty="0"/>
+              <a:t/>
+            </a:r>
+            <a:endParaRPr lang="en-US" dirty="0"/>
+          </a:p>
+        </p:txBody>
+      </p:sp>
+      <p:sp>
+        <p:nvSpPr>
+          <p:cNvPr id="4" name="Slide Number Placeholder 3"/>
+          <p:cNvSpPr>
+            <a:spLocks noGrp="1"/>
+          </p:cNvSpPr>
+          <p:nvPr>
+            <p:ph type="sldNum" sz="quarter" idx="10"/>
+          </p:nvPr>
+        </p:nvSpPr>
+        <p:spPr/>
+        <p:txBody>
+          <a:bodyPr/>
+          <a:lstStyle/>
+          <a:p>
+            <a:fld id="{F7021451-1387-4CA6-816F-3879F97B5CBC}" type="slidenum">
+              <a:rPr lang="en-US"/>
+              <a:t>14</a:t>
+            </a:fld>
+            <a:endParaRPr lang="en-US"/>
+          </a:p>
+        </p:txBody>
+      </p:sp>
+    </p:spTree>
+    <p:extLst>
+      <p:ext uri="{BB962C8B-B14F-4D97-AF65-F5344CB8AC3E}">
+        <p14:creationId xmlns:p14="http://schemas.microsoft.com/office/powerpoint/2010/main" val="1024086991"/>
+      </p:ext>
+    </p:extLst>
+  </p:cSld>
+  <p:clrMapOvr>
+    <a:masterClrMapping/>
+  </p:clrMapOvr>
+</p:notes>
+</file>
+
+<file path=ppt/notesSlides/notesSlide15.xml><?xml version="1.0" encoding="utf-8"?>
+<p:notes xmlns:a="http://schemas.openxmlformats.org/drawingml/2006/main" xmlns:r="http://schemas.openxmlformats.org/officeDocument/2006/relationships" xmlns:p="http://schemas.openxmlformats.org/presentationml/2006/main">
+  <p:cSld>
+    <p:spTree>
+      <p:nvGrpSpPr>
+        <p:cNvPr id="1" name=""/>
+        <p:cNvGrpSpPr/>
+        <p:nvPr/>
+      </p:nvGrpSpPr>
+      <p:grpSpPr>
+        <a:xfrm>
+          <a:off x="0" y="0"/>
+          <a:ext cx="0" cy="0"/>
+          <a:chOff x="0" y="0"/>
+          <a:chExt cx="0" cy="0"/>
+        </a:xfrm>
+      </p:grpSpPr>
+      <p:sp>
+        <p:nvSpPr>
+          <p:cNvPr id="2" name="Slide Image Placeholder 1"/>
+          <p:cNvSpPr>
+            <a:spLocks noGrp="1" noRot="1" noChangeAspect="1"/>
+          </p:cNvSpPr>
+          <p:nvPr>
+            <p:ph type="sldImg"/>
+          </p:nvPr>
+        </p:nvSpPr>
+        <p:spPr/>
+      </p:sp>
+      <p:sp>
+        <p:nvSpPr>
+          <p:cNvPr id="3" name="Notes Placeholder 2"/>
+          <p:cNvSpPr>
+            <a:spLocks noGrp="1"/>
+          </p:cNvSpPr>
+          <p:nvPr>
+            <p:ph type="body" idx="1"/>
+          </p:nvPr>
+        </p:nvSpPr>
+        <p:spPr/>
+        <p:txBody>
+          <a:bodyPr/>
+          <a:lstStyle/>
+          <a:p>
+            <a:r>
+              <a:rPr lang="en-US" dirty="0"/>
+              <a:t/>
+            </a:r>
+            <a:endParaRPr lang="en-US" dirty="0"/>
+          </a:p>
+        </p:txBody>
+      </p:sp>
+      <p:sp>
+        <p:nvSpPr>
+          <p:cNvPr id="4" name="Slide Number Placeholder 3"/>
+          <p:cNvSpPr>
+            <a:spLocks noGrp="1"/>
+          </p:cNvSpPr>
+          <p:nvPr>
+            <p:ph type="sldNum" sz="quarter" idx="10"/>
+          </p:nvPr>
+        </p:nvSpPr>
+        <p:spPr/>
+        <p:txBody>
+          <a:bodyPr/>
+          <a:lstStyle/>
+          <a:p>
+            <a:fld id="{F7021451-1387-4CA6-816F-3879F97B5CBC}" type="slidenum">
+              <a:rPr lang="en-US"/>
+              <a:t>15</a:t>
+            </a:fld>
+            <a:endParaRPr lang="en-US"/>
+          </a:p>
+        </p:txBody>
+      </p:sp>
+    </p:spTree>
+    <p:extLst>
+      <p:ext uri="{BB962C8B-B14F-4D97-AF65-F5344CB8AC3E}">
+        <p14:creationId xmlns:p14="http://schemas.microsoft.com/office/powerpoint/2010/main" val="1024086991"/>
+      </p:ext>
+    </p:extLst>
+  </p:cSld>
+  <p:clrMapOvr>
+    <a:masterClrMapping/>
+  </p:clrMapOvr>
+</p:notes>
+</file>
+
+<file path=ppt/notesSlides/notesSlide16.xml><?xml version="1.0" encoding="utf-8"?>
+<p:notes xmlns:a="http://schemas.openxmlformats.org/drawingml/2006/main" xmlns:r="http://schemas.openxmlformats.org/officeDocument/2006/relationships" xmlns:p="http://schemas.openxmlformats.org/presentationml/2006/main">
+  <p:cSld>
+    <p:spTree>
+      <p:nvGrpSpPr>
+        <p:cNvPr id="1" name=""/>
+        <p:cNvGrpSpPr/>
+        <p:nvPr/>
+      </p:nvGrpSpPr>
+      <p:grpSpPr>
+        <a:xfrm>
+          <a:off x="0" y="0"/>
+          <a:ext cx="0" cy="0"/>
+          <a:chOff x="0" y="0"/>
+          <a:chExt cx="0" cy="0"/>
+        </a:xfrm>
+      </p:grpSpPr>
+      <p:sp>
+        <p:nvSpPr>
+          <p:cNvPr id="2" name="Slide Image Placeholder 1"/>
+          <p:cNvSpPr>
+            <a:spLocks noGrp="1" noRot="1" noChangeAspect="1"/>
+          </p:cNvSpPr>
+          <p:nvPr>
+            <p:ph type="sldImg"/>
+          </p:nvPr>
+        </p:nvSpPr>
+        <p:spPr/>
+      </p:sp>
+      <p:sp>
+        <p:nvSpPr>
+          <p:cNvPr id="3" name="Notes Placeholder 2"/>
+          <p:cNvSpPr>
+            <a:spLocks noGrp="1"/>
+          </p:cNvSpPr>
+          <p:nvPr>
+            <p:ph type="body" idx="1"/>
+          </p:nvPr>
+        </p:nvSpPr>
+        <p:spPr/>
+        <p:txBody>
+          <a:bodyPr/>
+          <a:lstStyle/>
+          <a:p>
+            <a:r>
+              <a:rPr lang="en-US" dirty="0"/>
+              <a:t/>
+            </a:r>
+            <a:endParaRPr lang="en-US" dirty="0"/>
+          </a:p>
+        </p:txBody>
+      </p:sp>
+      <p:sp>
+        <p:nvSpPr>
+          <p:cNvPr id="4" name="Slide Number Placeholder 3"/>
+          <p:cNvSpPr>
+            <a:spLocks noGrp="1"/>
+          </p:cNvSpPr>
+          <p:nvPr>
+            <p:ph type="sldNum" sz="quarter" idx="10"/>
+          </p:nvPr>
+        </p:nvSpPr>
+        <p:spPr/>
+        <p:txBody>
+          <a:bodyPr/>
+          <a:lstStyle/>
+          <a:p>
+            <a:fld id="{F7021451-1387-4CA6-816F-3879F97B5CBC}" type="slidenum">
+              <a:rPr lang="en-US"/>
+              <a:t>16</a:t>
+            </a:fld>
+            <a:endParaRPr lang="en-US"/>
+          </a:p>
+        </p:txBody>
+      </p:sp>
+    </p:spTree>
+    <p:extLst>
+      <p:ext uri="{BB962C8B-B14F-4D97-AF65-F5344CB8AC3E}">
+        <p14:creationId xmlns:p14="http://schemas.microsoft.com/office/powerpoint/2010/main" val="1024086991"/>
+      </p:ext>
+    </p:extLst>
+  </p:cSld>
+  <p:clrMapOvr>
+    <a:masterClrMapping/>
+  </p:clrMapOvr>
+</p:notes>
+</file>
+
+<file path=ppt/notesSlides/notesSlide17.xml><?xml version="1.0" encoding="utf-8"?>
+<p:notes xmlns:a="http://schemas.openxmlformats.org/drawingml/2006/main" xmlns:r="http://schemas.openxmlformats.org/officeDocument/2006/relationships" xmlns:p="http://schemas.openxmlformats.org/presentationml/2006/main">
+  <p:cSld>
+    <p:spTree>
+      <p:nvGrpSpPr>
+        <p:cNvPr id="1" name=""/>
+        <p:cNvGrpSpPr/>
+        <p:nvPr/>
+      </p:nvGrpSpPr>
+      <p:grpSpPr>
+        <a:xfrm>
+          <a:off x="0" y="0"/>
+          <a:ext cx="0" cy="0"/>
+          <a:chOff x="0" y="0"/>
+          <a:chExt cx="0" cy="0"/>
+        </a:xfrm>
+      </p:grpSpPr>
+      <p:sp>
+        <p:nvSpPr>
+          <p:cNvPr id="2" name="Slide Image Placeholder 1"/>
+          <p:cNvSpPr>
+            <a:spLocks noGrp="1" noRot="1" noChangeAspect="1"/>
+          </p:cNvSpPr>
+          <p:nvPr>
+            <p:ph type="sldImg"/>
+          </p:nvPr>
+        </p:nvSpPr>
+        <p:spPr/>
+      </p:sp>
+      <p:sp>
+        <p:nvSpPr>
+          <p:cNvPr id="3" name="Notes Placeholder 2"/>
+          <p:cNvSpPr>
+            <a:spLocks noGrp="1"/>
+          </p:cNvSpPr>
+          <p:nvPr>
+            <p:ph type="body" idx="1"/>
+          </p:nvPr>
+        </p:nvSpPr>
+        <p:spPr/>
+        <p:txBody>
+          <a:bodyPr/>
+          <a:lstStyle/>
+          <a:p>
+            <a:r>
+              <a:rPr lang="en-US" dirty="0"/>
+              <a:t/>
+            </a:r>
+            <a:endParaRPr lang="en-US" dirty="0"/>
+          </a:p>
+        </p:txBody>
+      </p:sp>
+      <p:sp>
+        <p:nvSpPr>
+          <p:cNvPr id="4" name="Slide Number Placeholder 3"/>
+          <p:cNvSpPr>
+            <a:spLocks noGrp="1"/>
+          </p:cNvSpPr>
+          <p:nvPr>
+            <p:ph type="sldNum" sz="quarter" idx="10"/>
+          </p:nvPr>
+        </p:nvSpPr>
+        <p:spPr/>
+        <p:txBody>
+          <a:bodyPr/>
+          <a:lstStyle/>
+          <a:p>
+            <a:fld id="{F7021451-1387-4CA6-816F-3879F97B5CBC}" type="slidenum">
+              <a:rPr lang="en-US"/>
+              <a:t>17</a:t>
+            </a:fld>
+            <a:endParaRPr lang="en-US"/>
+          </a:p>
+        </p:txBody>
+      </p:sp>
+    </p:spTree>
+    <p:extLst>
+      <p:ext uri="{BB962C8B-B14F-4D97-AF65-F5344CB8AC3E}">
+        <p14:creationId xmlns:p14="http://schemas.microsoft.com/office/powerpoint/2010/main" val="1024086991"/>
+      </p:ext>
+    </p:extLst>
+  </p:cSld>
+  <p:clrMapOvr>
+    <a:masterClrMapping/>
+  </p:clrMapOvr>
+</p:notes>
+</file>
+
+<file path=ppt/notesSlides/notesSlide18.xml><?xml version="1.0" encoding="utf-8"?>
+<p:notes xmlns:a="http://schemas.openxmlformats.org/drawingml/2006/main" xmlns:r="http://schemas.openxmlformats.org/officeDocument/2006/relationships" xmlns:p="http://schemas.openxmlformats.org/presentationml/2006/main">
+  <p:cSld>
+    <p:spTree>
+      <p:nvGrpSpPr>
+        <p:cNvPr id="1" name=""/>
+        <p:cNvGrpSpPr/>
+        <p:nvPr/>
+      </p:nvGrpSpPr>
+      <p:grpSpPr>
+        <a:xfrm>
+          <a:off x="0" y="0"/>
+          <a:ext cx="0" cy="0"/>
+          <a:chOff x="0" y="0"/>
+          <a:chExt cx="0" cy="0"/>
+        </a:xfrm>
+      </p:grpSpPr>
+      <p:sp>
+        <p:nvSpPr>
+          <p:cNvPr id="2" name="Slide Image Placeholder 1"/>
+          <p:cNvSpPr>
+            <a:spLocks noGrp="1" noRot="1" noChangeAspect="1"/>
+          </p:cNvSpPr>
+          <p:nvPr>
+            <p:ph type="sldImg"/>
+          </p:nvPr>
+        </p:nvSpPr>
+        <p:spPr/>
+      </p:sp>
+      <p:sp>
+        <p:nvSpPr>
+          <p:cNvPr id="3" name="Notes Placeholder 2"/>
+          <p:cNvSpPr>
+            <a:spLocks noGrp="1"/>
+          </p:cNvSpPr>
+          <p:nvPr>
+            <p:ph type="body" idx="1"/>
+          </p:nvPr>
+        </p:nvSpPr>
+        <p:spPr/>
+        <p:txBody>
+          <a:bodyPr/>
+          <a:lstStyle/>
+          <a:p>
+            <a:r>
+              <a:rPr lang="en-US" dirty="0"/>
+              <a:t/>
+            </a:r>
+            <a:endParaRPr lang="en-US" dirty="0"/>
+          </a:p>
+        </p:txBody>
+      </p:sp>
+      <p:sp>
+        <p:nvSpPr>
+          <p:cNvPr id="4" name="Slide Number Placeholder 3"/>
+          <p:cNvSpPr>
+            <a:spLocks noGrp="1"/>
+          </p:cNvSpPr>
+          <p:nvPr>
+            <p:ph type="sldNum" sz="quarter" idx="10"/>
+          </p:nvPr>
+        </p:nvSpPr>
+        <p:spPr/>
+        <p:txBody>
+          <a:bodyPr/>
+          <a:lstStyle/>
+          <a:p>
+            <a:fld id="{F7021451-1387-4CA6-816F-3879F97B5CBC}" type="slidenum">
+              <a:rPr lang="en-US"/>
+              <a:t>18</a:t>
             </a:fld>
             <a:endParaRPr lang="en-US"/>
           </a:p>
@@ -2100,102 +2634,6 @@
         </p:nvSpPr>
         <p:spPr>
           <a:xfrm>
-            <a:off x="406301" y="1223963"/>
-            <a:ext cx="8498026" cy="274290"/>
-          </a:xfrm>
-          <a:prstGeom prst="rect">
-            <a:avLst/>
-          </a:prstGeom>
-          <a:noFill/>
-          <a:ln/>
-        </p:spPr>
-        <p:txBody>
-          <a:bodyPr wrap="square" lIns="0" tIns="0" rIns="0" bIns="0" rtlCol="0" anchor="t"/>
-          <a:lstStyle/>
-          <a:p>
-            <a:pPr algn="l" indent="0" marL="0">
-              <a:lnSpc>
-                <a:spcPts val="2160"/>
-              </a:lnSpc>
-              <a:spcBef>
-                <a:spcPts val="600"/>
-              </a:spcBef>
-              <a:spcAft>
-                <a:spcPts val="800"/>
-              </a:spcAft>
-              <a:buNone/>
-            </a:pPr>
-            <a:r>
-              <a:rPr lang="en-US" sz="1800" b="1" dirty="0">
-                <a:solidFill>
-                  <a:srgbClr val="FE4447"/>
-                </a:solidFill>
-                <a:latin typeface="Georgia" pitchFamily="34" charset="0"/>
-                <a:ea typeface="Georgia" pitchFamily="34" charset="-122"/>
-                <a:cs typeface="Georgia" pitchFamily="34" charset="-120"/>
-              </a:rPr>
-              <a:t>Learning objective</a:t>
-            </a:r>
-            <a:endParaRPr lang="en-US" sz="1800" dirty="0"/>
-          </a:p>
-        </p:txBody>
-      </p:sp>
-      <p:sp>
-        <p:nvSpPr>
-          <p:cNvPr id="6" name="Text 4"/>
-          <p:cNvSpPr/>
-          <p:nvPr/>
-        </p:nvSpPr>
-        <p:spPr>
-          <a:xfrm>
-            <a:off x="406301" y="1637854"/>
-            <a:ext cx="8498026" cy="426541"/>
-          </a:xfrm>
-          <a:prstGeom prst="rect">
-            <a:avLst/>
-          </a:prstGeom>
-          <a:noFill/>
-          <a:ln/>
-        </p:spPr>
-        <p:txBody>
-          <a:bodyPr wrap="square" lIns="0" tIns="0" rIns="0" bIns="0" rtlCol="0" anchor="t"/>
-          <a:lstStyle/>
-          <a:p>
-            <a:pPr algn="l" indent="0" marL="0">
-              <a:lnSpc>
-                <a:spcPts val="1680"/>
-              </a:lnSpc>
-              <a:spcBef>
-                <a:spcPts val="300"/>
-              </a:spcBef>
-              <a:spcAft>
-                <a:spcPts val="300"/>
-              </a:spcAft>
-              <a:buNone/>
-            </a:pPr>
-            <a:r>
-              <a:rPr lang="en-US" sz="1200" dirty="0">
-                <a:solidFill>
-                  <a:srgbClr val="1C2833"/>
-                </a:solidFill>
-                <a:latin typeface="Arial" pitchFamily="34" charset="0"/>
-                <a:ea typeface="Arial" pitchFamily="34" charset="-122"/>
-                <a:cs typeface="Arial" pitchFamily="34" charset="-120"/>
-              </a:rPr>
-              <a:t>Students will produce a one-paragraph project plan with element (lunar topic), format, audience, and citation; and complete a first-draft artefact (poster sketch / video storyboard / slide outline).</a:t>
-            </a:r>
-            <a:endParaRPr lang="en-US" sz="1200" dirty="0"/>
-          </a:p>
-        </p:txBody>
-      </p:sp>
-      <p:sp>
-        <p:nvSpPr>
-          <p:cNvPr id="7" name="Text 5"/>
-          <p:cNvSpPr/>
-          <p:nvPr/>
-        </p:nvSpPr>
-        <p:spPr>
-          <a:xfrm>
             <a:off x="406301" y="4434929"/>
             <a:ext cx="8498026" cy="213271"/>
           </a:xfrm>
@@ -2340,7 +2778,7 @@
                 <a:ea typeface="Georgia" pitchFamily="34" charset="-122"/>
                 <a:cs typeface="Georgia" pitchFamily="34" charset="-120"/>
               </a:rPr>
-              <a:t>Differentiation</a:t>
+              <a:t>Activity (30 min) — Build (cont.)</a:t>
             </a:r>
             <a:endParaRPr lang="en-US" sz="1800" dirty="0"/>
           </a:p>
@@ -2355,7 +2793,7 @@
         <p:spPr>
           <a:xfrm>
             <a:off x="634901" y="883593"/>
-            <a:ext cx="8102798" cy="937022"/>
+            <a:ext cx="8102798" cy="281880"/>
           </a:xfrm>
           <a:prstGeom prst="rect">
             <a:avLst/>
@@ -2386,7 +2824,7 @@
                 <a:ea typeface="Arial" pitchFamily="34" charset="-122"/>
                 <a:cs typeface="Arial" pitchFamily="34" charset="-120"/>
               </a:rPr>
-              <a:t>One tier up:</a:t>
+              <a:t>Chosen format</a:t>
             </a:r>
             <a:pPr algn="l" indent="0" marL="0">
               <a:lnSpc>
@@ -2406,50 +2844,32 @@
                 <a:ea typeface="Arial" pitchFamily="34" charset="-122"/>
                 <a:cs typeface="Arial" pitchFamily="34" charset="-120"/>
               </a:rPr>
-              <a:t> Add a second citation. Two sources is a stronger project — for instance, paraphrase the </a:t>
-            </a:r>
-            <a:pPr algn="l" indent="0" marL="0">
-              <a:lnSpc>
-                <a:spcPts val="1620"/>
-              </a:lnSpc>
-              <a:spcAft>
-                <a:spcPts val="300"/>
-              </a:spcAft>
-              <a:buNone/>
-            </a:pPr>
-            <a:r>
-              <a:rPr lang="en-US" sz="1200" i="1" dirty="0">
-                <a:solidFill>
-                  <a:srgbClr val="1C2833"/>
-                </a:solidFill>
-                <a:latin typeface="Arial" pitchFamily="34" charset="0"/>
-                <a:ea typeface="Arial" pitchFamily="34" charset="-122"/>
-                <a:cs typeface="Arial" pitchFamily="34" charset="-120"/>
-              </a:rPr>
-              <a:t>Sūrya-siddhānta</a:t>
-            </a:r>
-            <a:pPr algn="l" indent="0" marL="0">
-              <a:lnSpc>
-                <a:spcPts val="1620"/>
-              </a:lnSpc>
-              <a:spcAft>
-                <a:spcPts val="300"/>
-              </a:spcAft>
-              <a:buNone/>
-            </a:pPr>
-            <a:r>
-              <a:rPr lang="en-US" sz="1200" dirty="0">
-                <a:solidFill>
-                  <a:srgbClr val="1C2833"/>
-                </a:solidFill>
-                <a:latin typeface="Arial" pitchFamily="34" charset="0"/>
-                <a:ea typeface="Arial" pitchFamily="34" charset="-122"/>
-                <a:cs typeface="Arial" pitchFamily="34" charset="-120"/>
-              </a:rPr>
-              <a:t> AND cite NASA's phase calendar.</a:t>
+              <a:t> — one of:</a:t>
             </a:r>
             <a:endParaRPr lang="en-US" sz="1200" dirty="0"/>
           </a:p>
+        </p:txBody>
+      </p:sp>
+      <p:sp>
+        <p:nvSpPr>
+          <p:cNvPr id="5" name="Text 3"/>
+          <p:cNvSpPr/>
+          <p:nvPr/>
+        </p:nvSpPr>
+        <p:spPr>
+          <a:xfrm>
+            <a:off x="634901" y="1266974"/>
+            <a:ext cx="8102798" cy="1500783"/>
+          </a:xfrm>
+          <a:prstGeom prst="rect">
+            <a:avLst/>
+          </a:prstGeom>
+          <a:noFill/>
+          <a:ln/>
+        </p:spPr>
+        <p:txBody>
+          <a:bodyPr wrap="square" lIns="0" tIns="0" rIns="0" bIns="0" rtlCol="0" anchor="t"/>
+          <a:lstStyle/>
           <a:p>
             <a:pPr algn="l" marL="342900" indent="-342900">
               <a:lnSpc>
@@ -2462,24 +2882,28 @@
               <a:buChar char="•"/>
             </a:pPr>
             <a:r>
-              <a:rPr lang="en-US" sz="1200" b="1" dirty="0">
-                <a:solidFill>
-                  <a:srgbClr val="1C2833"/>
-                </a:solidFill>
-                <a:latin typeface="Arial" pitchFamily="34" charset="0"/>
-                <a:ea typeface="Arial" pitchFamily="34" charset="-122"/>
-                <a:cs typeface="Arial" pitchFamily="34" charset="-120"/>
-              </a:rPr>
-              <a:t>One tier down:</a:t>
-            </a:r>
-            <a:pPr algn="l" indent="0" marL="0">
+              <a:rPr lang="en-US" sz="1200" dirty="0">
+                <a:solidFill>
+                  <a:srgbClr val="1C2833"/>
+                </a:solidFill>
+                <a:latin typeface="Arial" pitchFamily="34" charset="0"/>
+                <a:ea typeface="Arial" pitchFamily="34" charset="-122"/>
+                <a:cs typeface="Arial" pitchFamily="34" charset="-120"/>
+              </a:rPr>
+              <a:t>Poster (A2 or larger)</a:t>
+            </a:r>
+            <a:endParaRPr lang="en-US" sz="1200" dirty="0"/>
+          </a:p>
+          <a:p>
+            <a:pPr algn="l" marL="342900" indent="-342900">
               <a:lnSpc>
                 <a:spcPts val="1620"/>
               </a:lnSpc>
               <a:spcAft>
                 <a:spcPts val="300"/>
               </a:spcAft>
-              <a:buNone/>
+              <a:buSzPct val="100000"/>
+              <a:buChar char="•"/>
             </a:pPr>
             <a:r>
               <a:rPr lang="en-US" sz="1200" dirty="0">
@@ -2490,15 +2914,111 @@
                 <a:ea typeface="Arial" pitchFamily="34" charset="-122"/>
                 <a:cs typeface="Arial" pitchFamily="34" charset="-120"/>
               </a:rPr>
-              <a:t> Reduce scope. Pick ONE phenomenon (phases, eclipses, or the calendar) and explain it in one paragraph + one diagram. That's a complete project.</a:t>
+              <a:t>Slide deck (5–8 slides, projected)</a:t>
             </a:r>
             <a:endParaRPr lang="en-US" sz="1200" dirty="0"/>
           </a:p>
-        </p:txBody>
-      </p:sp>
-      <p:sp>
-        <p:nvSpPr>
-          <p:cNvPr id="5" name="Text 3"/>
+          <a:p>
+            <a:pPr algn="l" marL="342900" indent="-342900">
+              <a:lnSpc>
+                <a:spcPts val="1620"/>
+              </a:lnSpc>
+              <a:spcAft>
+                <a:spcPts val="300"/>
+              </a:spcAft>
+              <a:buSzPct val="100000"/>
+              <a:buChar char="•"/>
+            </a:pPr>
+            <a:r>
+              <a:rPr lang="en-US" sz="1200" dirty="0">
+                <a:solidFill>
+                  <a:srgbClr val="1C2833"/>
+                </a:solidFill>
+                <a:latin typeface="Arial" pitchFamily="34" charset="0"/>
+                <a:ea typeface="Arial" pitchFamily="34" charset="-122"/>
+                <a:cs typeface="Arial" pitchFamily="34" charset="-120"/>
+              </a:rPr>
+              <a:t>90-second video</a:t>
+            </a:r>
+            <a:endParaRPr lang="en-US" sz="1200" dirty="0"/>
+          </a:p>
+          <a:p>
+            <a:pPr algn="l" marL="342900" indent="-342900">
+              <a:lnSpc>
+                <a:spcPts val="1620"/>
+              </a:lnSpc>
+              <a:spcAft>
+                <a:spcPts val="300"/>
+              </a:spcAft>
+              <a:buSzPct val="100000"/>
+              <a:buChar char="•"/>
+            </a:pPr>
+            <a:r>
+              <a:rPr lang="en-US" sz="1200" dirty="0">
+                <a:solidFill>
+                  <a:srgbClr val="1C2833"/>
+                </a:solidFill>
+                <a:latin typeface="Arial" pitchFamily="34" charset="0"/>
+                <a:ea typeface="Arial" pitchFamily="34" charset="-122"/>
+                <a:cs typeface="Arial" pitchFamily="34" charset="-120"/>
+              </a:rPr>
+              <a:t>1-page printed story / explainer</a:t>
+            </a:r>
+            <a:endParaRPr lang="en-US" sz="1200" dirty="0"/>
+          </a:p>
+          <a:p>
+            <a:pPr algn="l" marL="342900" indent="-342900">
+              <a:lnSpc>
+                <a:spcPts val="1620"/>
+              </a:lnSpc>
+              <a:spcAft>
+                <a:spcPts val="300"/>
+              </a:spcAft>
+              <a:buSzPct val="100000"/>
+              <a:buChar char="•"/>
+            </a:pPr>
+            <a:r>
+              <a:rPr lang="en-US" sz="1200" dirty="0">
+                <a:solidFill>
+                  <a:srgbClr val="1C2833"/>
+                </a:solidFill>
+                <a:latin typeface="Arial" pitchFamily="34" charset="0"/>
+                <a:ea typeface="Arial" pitchFamily="34" charset="-122"/>
+                <a:cs typeface="Arial" pitchFamily="34" charset="-120"/>
+              </a:rPr>
+              <a:t>Live demonstration with the torch and ball</a:t>
+            </a:r>
+            <a:endParaRPr lang="en-US" sz="1200" dirty="0"/>
+          </a:p>
+          <a:p>
+            <a:pPr algn="l" marL="342900" indent="-342900">
+              <a:lnSpc>
+                <a:spcPts val="1620"/>
+              </a:lnSpc>
+              <a:spcAft>
+                <a:spcPts val="300"/>
+              </a:spcAft>
+              <a:buSzPct val="100000"/>
+              <a:buChar char="•"/>
+            </a:pPr>
+            <a:r>
+              <a:rPr lang="en-US" sz="1200" dirty="0">
+                <a:solidFill>
+                  <a:srgbClr val="1C2833"/>
+                </a:solidFill>
+                <a:latin typeface="Arial" pitchFamily="34" charset="0"/>
+                <a:ea typeface="Arial" pitchFamily="34" charset="-122"/>
+                <a:cs typeface="Arial" pitchFamily="34" charset="-120"/>
+              </a:rPr>
+              <a:t>Infographic / data visualisation</a:t>
+            </a:r>
+            <a:endParaRPr lang="en-US" sz="1200" dirty="0"/>
+          </a:p>
+        </p:txBody>
+      </p:sp>
+      <p:sp>
+        <p:nvSpPr>
+          <p:cNvPr id="6" name="Text 4"/>
           <p:cNvSpPr/>
           <p:nvPr/>
         </p:nvSpPr>
@@ -2648,7 +3168,7 @@
                 <a:ea typeface="Georgia" pitchFamily="34" charset="-122"/>
                 <a:cs typeface="Georgia" pitchFamily="34" charset="-120"/>
               </a:rPr>
-              <a:t>Teacher notes</a:t>
+              <a:t>Activity (30 min) — Build (cont.)</a:t>
             </a:r>
             <a:endParaRPr lang="en-US" sz="1800" dirty="0"/>
           </a:p>
@@ -2662,8 +3182,8 @@
         </p:nvSpPr>
         <p:spPr>
           <a:xfrm>
-            <a:off x="406301" y="870942"/>
-            <a:ext cx="8498026" cy="853083"/>
+            <a:off x="634901" y="883593"/>
+            <a:ext cx="8102798" cy="487561"/>
           </a:xfrm>
           <a:prstGeom prst="rect">
             <a:avLst/>
@@ -2675,13 +3195,31 @@
           <a:bodyPr wrap="square" lIns="0" tIns="0" rIns="0" bIns="0" rtlCol="0" anchor="t"/>
           <a:lstStyle/>
           <a:p>
-            <a:pPr algn="l" indent="0" marL="0">
-              <a:lnSpc>
-                <a:spcPts val="1680"/>
-              </a:lnSpc>
-              <a:spcBef>
-                <a:spcPts val="300"/>
-              </a:spcBef>
+            <a:pPr algn="l" marL="342900" indent="-342900">
+              <a:lnSpc>
+                <a:spcPts val="1620"/>
+              </a:lnSpc>
+              <a:spcAft>
+                <a:spcPts val="300"/>
+              </a:spcAft>
+              <a:buSzPct val="100000"/>
+              <a:buChar char="•"/>
+            </a:pPr>
+            <a:r>
+              <a:rPr lang="en-US" sz="1200" b="1" dirty="0">
+                <a:solidFill>
+                  <a:srgbClr val="1C2833"/>
+                </a:solidFill>
+                <a:latin typeface="Arial" pitchFamily="34" charset="0"/>
+                <a:ea typeface="Arial" pitchFamily="34" charset="-122"/>
+                <a:cs typeface="Arial" pitchFamily="34" charset="-120"/>
+              </a:rPr>
+              <a:t>One source named</a:t>
+            </a:r>
+            <a:pPr algn="l" indent="0" marL="0">
+              <a:lnSpc>
+                <a:spcPts val="1620"/>
+              </a:lnSpc>
               <a:spcAft>
                 <a:spcPts val="300"/>
               </a:spcAft>
@@ -2696,15 +3234,92 @@
                 <a:ea typeface="Arial" pitchFamily="34" charset="-122"/>
                 <a:cs typeface="Arial" pitchFamily="34" charset="-120"/>
               </a:rPr>
-              <a:t>– Pairs that are still "researching" by minute 20 are stuck. Push them to start sketching/drafting even if incomplete. The artefact concretises the thinking. – Phone-photo submissions are fine. Photograph the draft poster against a wall; submit by email or via shared drive. – A common failure mode: pairs over-design the visual and under-write the explanation. Push toward writing the </a:t>
-            </a:r>
-            <a:pPr algn="l" indent="0" marL="0">
-              <a:lnSpc>
-                <a:spcPts val="1680"/>
-              </a:lnSpc>
-              <a:spcBef>
-                <a:spcPts val="300"/>
-              </a:spcBef>
+              <a:t> — </a:t>
+            </a:r>
+            <a:pPr algn="l" indent="0" marL="0">
+              <a:lnSpc>
+                <a:spcPts val="1620"/>
+              </a:lnSpc>
+              <a:spcAft>
+                <a:spcPts val="300"/>
+              </a:spcAft>
+              <a:buNone/>
+            </a:pPr>
+            <a:r>
+              <a:rPr lang="en-US" sz="1200" i="1" dirty="0">
+                <a:solidFill>
+                  <a:srgbClr val="1C2833"/>
+                </a:solidFill>
+                <a:latin typeface="Arial" pitchFamily="34" charset="0"/>
+                <a:ea typeface="Arial" pitchFamily="34" charset="-122"/>
+                <a:cs typeface="Arial" pitchFamily="34" charset="-120"/>
+              </a:rPr>
+              <a:t>Sūrya-siddhānta</a:t>
+            </a:r>
+            <a:pPr algn="l" indent="0" marL="0">
+              <a:lnSpc>
+                <a:spcPts val="1620"/>
+              </a:lnSpc>
+              <a:spcAft>
+                <a:spcPts val="300"/>
+              </a:spcAft>
+              <a:buNone/>
+            </a:pPr>
+            <a:r>
+              <a:rPr lang="en-US" sz="1200" dirty="0">
+                <a:solidFill>
+                  <a:srgbClr val="1C2833"/>
+                </a:solidFill>
+                <a:latin typeface="Arial" pitchFamily="34" charset="0"/>
+                <a:ea typeface="Arial" pitchFamily="34" charset="-122"/>
+                <a:cs typeface="Arial" pitchFamily="34" charset="-120"/>
+              </a:rPr>
+              <a:t> (paraphrased), NCERT Physics XI, NASA's phase calendar, the class </a:t>
+            </a:r>
+            <a:pPr algn="l" indent="0" marL="0">
+              <a:lnSpc>
+                <a:spcPts val="1620"/>
+              </a:lnSpc>
+              <a:spcAft>
+                <a:spcPts val="300"/>
+              </a:spcAft>
+              <a:buNone/>
+            </a:pPr>
+            <a:r>
+              <a:rPr lang="en-US" sz="1200" i="1" dirty="0">
+                <a:solidFill>
+                  <a:srgbClr val="1C2833"/>
+                </a:solidFill>
+                <a:latin typeface="Arial" pitchFamily="34" charset="0"/>
+                <a:ea typeface="Arial" pitchFamily="34" charset="-122"/>
+                <a:cs typeface="Arial" pitchFamily="34" charset="-120"/>
+              </a:rPr>
+              <a:t>pañcāṅga</a:t>
+            </a:r>
+            <a:pPr algn="l" indent="0" marL="0">
+              <a:lnSpc>
+                <a:spcPts val="1620"/>
+              </a:lnSpc>
+              <a:spcAft>
+                <a:spcPts val="300"/>
+              </a:spcAft>
+              <a:buNone/>
+            </a:pPr>
+            <a:r>
+              <a:rPr lang="en-US" sz="1200" dirty="0">
+                <a:solidFill>
+                  <a:srgbClr val="1C2833"/>
+                </a:solidFill>
+                <a:latin typeface="Arial" pitchFamily="34" charset="0"/>
+                <a:ea typeface="Arial" pitchFamily="34" charset="-122"/>
+                <a:cs typeface="Arial" pitchFamily="34" charset="-120"/>
+              </a:rPr>
+              <a:t>, etc. </a:t>
+            </a:r>
+            <a:pPr algn="l" indent="0" marL="0">
+              <a:lnSpc>
+                <a:spcPts val="1620"/>
+              </a:lnSpc>
               <a:spcAft>
                 <a:spcPts val="300"/>
               </a:spcAft>
@@ -2719,15 +3334,58 @@
                 <a:ea typeface="Arial" pitchFamily="34" charset="-122"/>
                 <a:cs typeface="Arial" pitchFamily="34" charset="-120"/>
               </a:rPr>
-              <a:t>3-minute script</a:t>
-            </a:r>
-            <a:pPr algn="l" indent="0" marL="0">
-              <a:lnSpc>
-                <a:spcPts val="1680"/>
-              </a:lnSpc>
-              <a:spcBef>
-                <a:spcPts val="300"/>
-              </a:spcBef>
+              <a:t>Real sources only.</a:t>
+            </a:r>
+            <a:endParaRPr lang="en-US" sz="1200" dirty="0"/>
+          </a:p>
+        </p:txBody>
+      </p:sp>
+      <p:sp>
+        <p:nvSpPr>
+          <p:cNvPr id="5" name="Text 3"/>
+          <p:cNvSpPr/>
+          <p:nvPr/>
+        </p:nvSpPr>
+        <p:spPr>
+          <a:xfrm>
+            <a:off x="634901" y="1472654"/>
+            <a:ext cx="8102798" cy="281880"/>
+          </a:xfrm>
+          <a:prstGeom prst="rect">
+            <a:avLst/>
+          </a:prstGeom>
+          <a:noFill/>
+          <a:ln/>
+        </p:spPr>
+        <p:txBody>
+          <a:bodyPr wrap="square" lIns="0" tIns="0" rIns="0" bIns="0" rtlCol="0" anchor="t"/>
+          <a:lstStyle/>
+          <a:p>
+            <a:pPr algn="l" marL="342900" indent="-342900">
+              <a:lnSpc>
+                <a:spcPts val="1620"/>
+              </a:lnSpc>
+              <a:spcAft>
+                <a:spcPts val="300"/>
+              </a:spcAft>
+              <a:buSzPct val="100000"/>
+              <a:buChar char="•"/>
+            </a:pPr>
+            <a:r>
+              <a:rPr lang="en-US" sz="1200" b="1" dirty="0">
+                <a:solidFill>
+                  <a:srgbClr val="1C2833"/>
+                </a:solidFill>
+                <a:latin typeface="Arial" pitchFamily="34" charset="0"/>
+                <a:ea typeface="Arial" pitchFamily="34" charset="-122"/>
+                <a:cs typeface="Arial" pitchFamily="34" charset="-120"/>
+              </a:rPr>
+              <a:t>By end of class:</a:t>
+            </a:r>
+            <a:pPr algn="l" indent="0" marL="0">
+              <a:lnSpc>
+                <a:spcPts val="1620"/>
+              </a:lnSpc>
               <a:spcAft>
                 <a:spcPts val="300"/>
               </a:spcAft>
@@ -2742,7 +3400,7 @@
                 <a:ea typeface="Arial" pitchFamily="34" charset="-122"/>
                 <a:cs typeface="Arial" pitchFamily="34" charset="-120"/>
               </a:rPr>
-              <a:t> by end of class.</a:t>
+              <a:t> a one-paragraph plan + a first-draft artefact (a poster sketch, video storyboard, slide outline).</a:t>
             </a:r>
             <a:endParaRPr lang="en-US" sz="1200" dirty="0"/>
           </a:p>
@@ -2750,7 +3408,7 @@
       </p:sp>
       <p:sp>
         <p:nvSpPr>
-          <p:cNvPr id="5" name="Text 3"/>
+          <p:cNvPr id="6" name="Text 4"/>
           <p:cNvSpPr/>
           <p:nvPr/>
         </p:nvSpPr>
@@ -2900,7 +3558,7 @@
                 <a:ea typeface="Georgia" pitchFamily="34" charset="-122"/>
                 <a:cs typeface="Georgia" pitchFamily="34" charset="-120"/>
               </a:rPr>
-              <a:t>Citation(s) used in this lesson</a:t>
+              <a:t>Activity (30 min) — Build (cont.)</a:t>
             </a:r>
             <a:endParaRPr lang="en-US" sz="1800" dirty="0"/>
           </a:p>
@@ -2915,7 +3573,7 @@
         <p:spPr>
           <a:xfrm>
             <a:off x="406301" y="870942"/>
-            <a:ext cx="8498026" cy="436066"/>
+            <a:ext cx="8498026" cy="213271"/>
           </a:xfrm>
           <a:prstGeom prst="rect">
             <a:avLst/>
@@ -2948,8 +3606,127 @@
                 <a:ea typeface="Arial" pitchFamily="34" charset="-122"/>
                 <a:cs typeface="Arial" pitchFamily="34" charset="-120"/>
               </a:rPr>
-              <a:t>– The rubric (</a:t>
-            </a:r>
+              <a:t>The teacher intervenes if:</a:t>
+            </a:r>
+            <a:endParaRPr lang="en-US" sz="1200" dirty="0"/>
+          </a:p>
+        </p:txBody>
+      </p:sp>
+      <p:sp>
+        <p:nvSpPr>
+          <p:cNvPr id="5" name="Text 3"/>
+          <p:cNvSpPr/>
+          <p:nvPr/>
+        </p:nvSpPr>
+        <p:spPr>
+          <a:xfrm>
+            <a:off x="634901" y="1173063"/>
+            <a:ext cx="8102798" cy="769441"/>
+          </a:xfrm>
+          <a:prstGeom prst="rect">
+            <a:avLst/>
+          </a:prstGeom>
+          <a:noFill/>
+          <a:ln/>
+        </p:spPr>
+        <p:txBody>
+          <a:bodyPr wrap="square" lIns="0" tIns="0" rIns="0" bIns="0" rtlCol="0" anchor="t"/>
+          <a:lstStyle/>
+          <a:p>
+            <a:pPr algn="l" marL="342900" indent="-342900">
+              <a:lnSpc>
+                <a:spcPts val="1620"/>
+              </a:lnSpc>
+              <a:spcAft>
+                <a:spcPts val="300"/>
+              </a:spcAft>
+              <a:buSzPct val="100000"/>
+              <a:buChar char="•"/>
+            </a:pPr>
+            <a:r>
+              <a:rPr lang="en-US" sz="1200" dirty="0">
+                <a:solidFill>
+                  <a:srgbClr val="1C2833"/>
+                </a:solidFill>
+                <a:latin typeface="Arial" pitchFamily="34" charset="0"/>
+                <a:ea typeface="Arial" pitchFamily="34" charset="-122"/>
+                <a:cs typeface="Arial" pitchFamily="34" charset="-120"/>
+              </a:rPr>
+              <a:t>A pair is still debating topic at minute 15 — give them 5 minutes, then assign.</a:t>
+            </a:r>
+            <a:endParaRPr lang="en-US" sz="1200" dirty="0"/>
+          </a:p>
+          <a:p>
+            <a:pPr algn="l" marL="342900" indent="-342900">
+              <a:lnSpc>
+                <a:spcPts val="1620"/>
+              </a:lnSpc>
+              <a:spcAft>
+                <a:spcPts val="300"/>
+              </a:spcAft>
+              <a:buSzPct val="100000"/>
+              <a:buChar char="•"/>
+            </a:pPr>
+            <a:r>
+              <a:rPr lang="en-US" sz="1200" dirty="0">
+                <a:solidFill>
+                  <a:srgbClr val="1C2833"/>
+                </a:solidFill>
+                <a:latin typeface="Arial" pitchFamily="34" charset="0"/>
+                <a:ea typeface="Arial" pitchFamily="34" charset="-122"/>
+                <a:cs typeface="Arial" pitchFamily="34" charset="-120"/>
+              </a:rPr>
+              <a:t>A pair's source is invented or unverifiable — flag it; help them swap.</a:t>
+            </a:r>
+            <a:endParaRPr lang="en-US" sz="1200" dirty="0"/>
+          </a:p>
+          <a:p>
+            <a:pPr algn="l" marL="342900" indent="-342900">
+              <a:lnSpc>
+                <a:spcPts val="1620"/>
+              </a:lnSpc>
+              <a:spcAft>
+                <a:spcPts val="300"/>
+              </a:spcAft>
+              <a:buSzPct val="100000"/>
+              <a:buChar char="•"/>
+            </a:pPr>
+            <a:r>
+              <a:rPr lang="en-US" sz="1200" dirty="0">
+                <a:solidFill>
+                  <a:srgbClr val="1C2833"/>
+                </a:solidFill>
+                <a:latin typeface="Arial" pitchFamily="34" charset="0"/>
+                <a:ea typeface="Arial" pitchFamily="34" charset="-122"/>
+                <a:cs typeface="Arial" pitchFamily="34" charset="-120"/>
+              </a:rPr>
+              <a:t>A pair has split unequally — re-balance the workload before they leave.</a:t>
+            </a:r>
+            <a:endParaRPr lang="en-US" sz="1200" dirty="0"/>
+          </a:p>
+        </p:txBody>
+      </p:sp>
+      <p:sp>
+        <p:nvSpPr>
+          <p:cNvPr id="6" name="Text 4"/>
+          <p:cNvSpPr/>
+          <p:nvPr/>
+        </p:nvSpPr>
+        <p:spPr>
+          <a:xfrm>
+            <a:off x="406301" y="4434929"/>
+            <a:ext cx="8498026" cy="213271"/>
+          </a:xfrm>
+          <a:prstGeom prst="rect">
+            <a:avLst/>
+          </a:prstGeom>
+          <a:noFill/>
+          <a:ln/>
+        </p:spPr>
+        <p:txBody>
+          <a:bodyPr wrap="square" lIns="0" tIns="0" rIns="0" bIns="0" rtlCol="0" anchor="t"/>
+          <a:lstStyle/>
+          <a:p>
             <a:pPr algn="l" indent="0" marL="0">
               <a:lnSpc>
                 <a:spcPts val="1680"/>
@@ -2971,15 +3748,1803 @@
                 <a:ea typeface="Arial" pitchFamily="34" charset="-122"/>
                 <a:cs typeface="Arial" pitchFamily="34" charset="-120"/>
               </a:rPr>
+              <a:t>Middle ·  · IKS Curriculum</a:t>
+            </a:r>
+            <a:endParaRPr lang="en-US" sz="1200" dirty="0"/>
+          </a:p>
+        </p:txBody>
+      </p:sp>
+    </p:spTree>
+  </p:cSld>
+  <p:clrMapOvr>
+    <a:masterClrMapping/>
+  </p:clrMapOvr>
+</p:sld>
+</file>
+
+<file path=ppt/slides/slide13.xml><?xml version="1.0" encoding="utf-8"?>
+<p:sld xmlns:a="http://schemas.openxmlformats.org/drawingml/2006/main" xmlns:r="http://schemas.openxmlformats.org/officeDocument/2006/relationships" xmlns:p="http://schemas.openxmlformats.org/presentationml/2006/main">
+  <p:cSld name="Slide 13">
+    <p:bg>
+      <p:bgPr>
+        <a:solidFill>
+          <a:srgbClr val="FFFFFF"/>
+        </a:solidFill>
+      </p:bgPr>
+    </p:bg>
+    <p:spTree>
+      <p:nvGrpSpPr>
+        <p:cNvPr id="1" name=""/>
+        <p:cNvGrpSpPr/>
+        <p:nvPr/>
+      </p:nvGrpSpPr>
+      <p:grpSpPr>
+        <a:xfrm>
+          <a:off x="0" y="0"/>
+          <a:ext cx="0" cy="0"/>
+          <a:chOff x="0" y="0"/>
+          <a:chExt cx="0" cy="0"/>
+        </a:xfrm>
+      </p:grpSpPr>
+      <p:sp>
+        <p:nvSpPr>
+          <p:cNvPr id="2" name="Text 0"/>
+          <p:cNvSpPr/>
+          <p:nvPr/>
+        </p:nvSpPr>
+        <p:spPr>
+          <a:xfrm>
+            <a:off x="0" y="0"/>
+            <a:ext cx="9144000" cy="101501"/>
+          </a:xfrm>
+          <a:prstGeom prst="rect">
+            <a:avLst/>
+          </a:prstGeom>
+          <a:solidFill>
+            <a:srgbClr val="277884"/>
+          </a:solidFill>
+          <a:ln/>
+        </p:spPr>
+        <p:txBody>
+          <a:bodyPr wrap="square" rtlCol="0" anchor="ctr"/>
+          <a:lstStyle/>
+          <a:p>
+            <a:pPr indent="0" marL="0">
+              <a:buNone/>
+            </a:pPr>
+            <a:endParaRPr lang="en-US" dirty="0"/>
+          </a:p>
+        </p:txBody>
+      </p:sp>
+      <p:sp>
+        <p:nvSpPr>
+          <p:cNvPr id="3" name="Text 1"/>
+          <p:cNvSpPr/>
+          <p:nvPr/>
+        </p:nvSpPr>
+        <p:spPr>
+          <a:xfrm>
+            <a:off x="406301" y="457051"/>
+            <a:ext cx="8498026" cy="274290"/>
+          </a:xfrm>
+          <a:prstGeom prst="rect">
+            <a:avLst/>
+          </a:prstGeom>
+          <a:noFill/>
+          <a:ln/>
+        </p:spPr>
+        <p:txBody>
+          <a:bodyPr wrap="square" lIns="0" tIns="0" rIns="0" bIns="0" rtlCol="0" anchor="t"/>
+          <a:lstStyle/>
+          <a:p>
+            <a:pPr algn="l" indent="0" marL="0">
+              <a:lnSpc>
+                <a:spcPts val="2160"/>
+              </a:lnSpc>
+              <a:spcBef>
+                <a:spcPts val="600"/>
+              </a:spcBef>
+              <a:spcAft>
+                <a:spcPts val="800"/>
+              </a:spcAft>
+              <a:buNone/>
+            </a:pPr>
+            <a:r>
+              <a:rPr lang="en-US" sz="1800" b="1" dirty="0">
+                <a:solidFill>
+                  <a:srgbClr val="FE4447"/>
+                </a:solidFill>
+                <a:latin typeface="Georgia" pitchFamily="34" charset="0"/>
+                <a:ea typeface="Georgia" pitchFamily="34" charset="-122"/>
+                <a:cs typeface="Georgia" pitchFamily="34" charset="-120"/>
+              </a:rPr>
+              <a:t>Wrap-up (5 min)</a:t>
+            </a:r>
+            <a:endParaRPr lang="en-US" sz="1800" dirty="0"/>
+          </a:p>
+        </p:txBody>
+      </p:sp>
+      <p:sp>
+        <p:nvSpPr>
+          <p:cNvPr id="4" name="Text 2"/>
+          <p:cNvSpPr/>
+          <p:nvPr/>
+        </p:nvSpPr>
+        <p:spPr>
+          <a:xfrm>
+            <a:off x="634901" y="883593"/>
+            <a:ext cx="8102798" cy="731341"/>
+          </a:xfrm>
+          <a:prstGeom prst="rect">
+            <a:avLst/>
+          </a:prstGeom>
+          <a:noFill/>
+          <a:ln/>
+        </p:spPr>
+        <p:txBody>
+          <a:bodyPr wrap="square" lIns="0" tIns="0" rIns="0" bIns="0" rtlCol="0" anchor="t"/>
+          <a:lstStyle/>
+          <a:p>
+            <a:pPr algn="l" marL="342900" indent="-342900">
+              <a:lnSpc>
+                <a:spcPts val="1620"/>
+              </a:lnSpc>
+              <a:spcAft>
+                <a:spcPts val="300"/>
+              </a:spcAft>
+              <a:buSzPct val="100000"/>
+              <a:buChar char="•"/>
+            </a:pPr>
+            <a:r>
+              <a:rPr lang="en-US" sz="1200" dirty="0">
+                <a:solidFill>
+                  <a:srgbClr val="1C2833"/>
+                </a:solidFill>
+                <a:latin typeface="Arial" pitchFamily="34" charset="0"/>
+                <a:ea typeface="Arial" pitchFamily="34" charset="-122"/>
+                <a:cs typeface="Arial" pitchFamily="34" charset="-120"/>
+              </a:rPr>
+              <a:t>Each pair submits their plan paragraph + first-draft artefact (phone photo accepted).</a:t>
+            </a:r>
+            <a:endParaRPr lang="en-US" sz="1200" dirty="0"/>
+          </a:p>
+          <a:p>
+            <a:pPr algn="l" marL="342900" indent="-342900">
+              <a:lnSpc>
+                <a:spcPts val="1620"/>
+              </a:lnSpc>
+              <a:spcAft>
+                <a:spcPts val="300"/>
+              </a:spcAft>
+              <a:buSzPct val="100000"/>
+              <a:buChar char="•"/>
+            </a:pPr>
+            <a:r>
+              <a:rPr lang="en-US" sz="1200" b="1" dirty="0">
+                <a:solidFill>
+                  <a:srgbClr val="1C2833"/>
+                </a:solidFill>
+                <a:latin typeface="Arial" pitchFamily="34" charset="0"/>
+                <a:ea typeface="Arial" pitchFamily="34" charset="-122"/>
+                <a:cs typeface="Arial" pitchFamily="34" charset="-120"/>
+              </a:rPr>
+              <a:t>Tomorrow:</a:t>
+            </a:r>
+            <a:pPr algn="l" indent="0" marL="0">
+              <a:lnSpc>
+                <a:spcPts val="1620"/>
+              </a:lnSpc>
+              <a:spcAft>
+                <a:spcPts val="300"/>
+              </a:spcAft>
+              <a:buNone/>
+            </a:pPr>
+            <a:r>
+              <a:rPr lang="en-US" sz="1200" dirty="0">
+                <a:solidFill>
+                  <a:srgbClr val="1C2833"/>
+                </a:solidFill>
+                <a:latin typeface="Arial" pitchFamily="34" charset="0"/>
+                <a:ea typeface="Arial" pitchFamily="34" charset="-122"/>
+                <a:cs typeface="Arial" pitchFamily="34" charset="-120"/>
+              </a:rPr>
+              <a:t> finish the build. The cross-cultural calendar lesson runs in parallel — 15 min content, then 30 min build time. Be ready.</a:t>
+            </a:r>
+            <a:endParaRPr lang="en-US" sz="1200" dirty="0"/>
+          </a:p>
+        </p:txBody>
+      </p:sp>
+      <p:sp>
+        <p:nvSpPr>
+          <p:cNvPr id="5" name="Text 3"/>
+          <p:cNvSpPr/>
+          <p:nvPr/>
+        </p:nvSpPr>
+        <p:spPr>
+          <a:xfrm>
+            <a:off x="406301" y="4434929"/>
+            <a:ext cx="8498026" cy="213271"/>
+          </a:xfrm>
+          <a:prstGeom prst="rect">
+            <a:avLst/>
+          </a:prstGeom>
+          <a:noFill/>
+          <a:ln/>
+        </p:spPr>
+        <p:txBody>
+          <a:bodyPr wrap="square" lIns="0" tIns="0" rIns="0" bIns="0" rtlCol="0" anchor="t"/>
+          <a:lstStyle/>
+          <a:p>
+            <a:pPr algn="l" indent="0" marL="0">
+              <a:lnSpc>
+                <a:spcPts val="1680"/>
+              </a:lnSpc>
+              <a:spcBef>
+                <a:spcPts val="300"/>
+              </a:spcBef>
+              <a:spcAft>
+                <a:spcPts val="300"/>
+              </a:spcAft>
+              <a:buNone/>
+            </a:pPr>
+            <a:r>
+              <a:rPr lang="en-US" sz="1200" dirty="0">
+                <a:solidFill>
+                  <a:srgbClr val="1C2833"/>
+                </a:solidFill>
+                <a:latin typeface="Arial" pitchFamily="34" charset="0"/>
+                <a:ea typeface="Arial" pitchFamily="34" charset="-122"/>
+                <a:cs typeface="Arial" pitchFamily="34" charset="-120"/>
+              </a:rPr>
+              <a:t>Middle ·  · IKS Curriculum</a:t>
+            </a:r>
+            <a:endParaRPr lang="en-US" sz="1200" dirty="0"/>
+          </a:p>
+        </p:txBody>
+      </p:sp>
+    </p:spTree>
+  </p:cSld>
+  <p:clrMapOvr>
+    <a:masterClrMapping/>
+  </p:clrMapOvr>
+</p:sld>
+</file>
+
+<file path=ppt/slides/slide14.xml><?xml version="1.0" encoding="utf-8"?>
+<p:sld xmlns:a="http://schemas.openxmlformats.org/drawingml/2006/main" xmlns:r="http://schemas.openxmlformats.org/officeDocument/2006/relationships" xmlns:p="http://schemas.openxmlformats.org/presentationml/2006/main">
+  <p:cSld name="Slide 14">
+    <p:bg>
+      <p:bgPr>
+        <a:solidFill>
+          <a:srgbClr val="FFFFFF"/>
+        </a:solidFill>
+      </p:bgPr>
+    </p:bg>
+    <p:spTree>
+      <p:nvGrpSpPr>
+        <p:cNvPr id="1" name=""/>
+        <p:cNvGrpSpPr/>
+        <p:nvPr/>
+      </p:nvGrpSpPr>
+      <p:grpSpPr>
+        <a:xfrm>
+          <a:off x="0" y="0"/>
+          <a:ext cx="0" cy="0"/>
+          <a:chOff x="0" y="0"/>
+          <a:chExt cx="0" cy="0"/>
+        </a:xfrm>
+      </p:grpSpPr>
+      <p:sp>
+        <p:nvSpPr>
+          <p:cNvPr id="2" name="Text 0"/>
+          <p:cNvSpPr/>
+          <p:nvPr/>
+        </p:nvSpPr>
+        <p:spPr>
+          <a:xfrm>
+            <a:off x="0" y="0"/>
+            <a:ext cx="9144000" cy="101501"/>
+          </a:xfrm>
+          <a:prstGeom prst="rect">
+            <a:avLst/>
+          </a:prstGeom>
+          <a:solidFill>
+            <a:srgbClr val="277884"/>
+          </a:solidFill>
+          <a:ln/>
+        </p:spPr>
+        <p:txBody>
+          <a:bodyPr wrap="square" rtlCol="0" anchor="ctr"/>
+          <a:lstStyle/>
+          <a:p>
+            <a:pPr indent="0" marL="0">
+              <a:buNone/>
+            </a:pPr>
+            <a:endParaRPr lang="en-US" dirty="0"/>
+          </a:p>
+        </p:txBody>
+      </p:sp>
+      <p:sp>
+        <p:nvSpPr>
+          <p:cNvPr id="3" name="Text 1"/>
+          <p:cNvSpPr/>
+          <p:nvPr/>
+        </p:nvSpPr>
+        <p:spPr>
+          <a:xfrm>
+            <a:off x="406301" y="457051"/>
+            <a:ext cx="8498026" cy="274290"/>
+          </a:xfrm>
+          <a:prstGeom prst="rect">
+            <a:avLst/>
+          </a:prstGeom>
+          <a:noFill/>
+          <a:ln/>
+        </p:spPr>
+        <p:txBody>
+          <a:bodyPr wrap="square" lIns="0" tIns="0" rIns="0" bIns="0" rtlCol="0" anchor="t"/>
+          <a:lstStyle/>
+          <a:p>
+            <a:pPr algn="l" indent="0" marL="0">
+              <a:lnSpc>
+                <a:spcPts val="2160"/>
+              </a:lnSpc>
+              <a:spcBef>
+                <a:spcPts val="600"/>
+              </a:spcBef>
+              <a:spcAft>
+                <a:spcPts val="800"/>
+              </a:spcAft>
+              <a:buNone/>
+            </a:pPr>
+            <a:r>
+              <a:rPr lang="en-US" sz="1800" b="1" dirty="0">
+                <a:solidFill>
+                  <a:srgbClr val="FE4447"/>
+                </a:solidFill>
+                <a:latin typeface="Georgia" pitchFamily="34" charset="0"/>
+                <a:ea typeface="Georgia" pitchFamily="34" charset="-122"/>
+                <a:cs typeface="Georgia" pitchFamily="34" charset="-120"/>
+              </a:rPr>
+              <a:t>Student-facing content</a:t>
+            </a:r>
+            <a:endParaRPr lang="en-US" sz="1800" dirty="0"/>
+          </a:p>
+        </p:txBody>
+      </p:sp>
+      <p:sp>
+        <p:nvSpPr>
+          <p:cNvPr id="4" name="Text 2"/>
+          <p:cNvSpPr/>
+          <p:nvPr/>
+        </p:nvSpPr>
+        <p:spPr>
+          <a:xfrm>
+            <a:off x="406301" y="883593"/>
+            <a:ext cx="8331398" cy="1957388"/>
+          </a:xfrm>
+          <a:prstGeom prst="rect">
+            <a:avLst/>
+          </a:prstGeom>
+          <a:solidFill>
+            <a:srgbClr val="F4F8F9"/>
+          </a:solidFill>
+          <a:ln/>
+        </p:spPr>
+        <p:txBody>
+          <a:bodyPr wrap="square" rtlCol="0" anchor="ctr"/>
+          <a:lstStyle/>
+          <a:p>
+            <a:pPr indent="0" marL="0">
+              <a:buNone/>
+            </a:pPr>
+            <a:endParaRPr lang="en-US" dirty="0"/>
+          </a:p>
+        </p:txBody>
+      </p:sp>
+      <p:sp>
+        <p:nvSpPr>
+          <p:cNvPr id="5" name="Shape 3"/>
+          <p:cNvSpPr/>
+          <p:nvPr/>
+        </p:nvSpPr>
+        <p:spPr>
+          <a:xfrm>
+            <a:off x="434876" y="883593"/>
+            <a:ext cx="0" cy="1957388"/>
+          </a:xfrm>
+          <a:prstGeom prst="line">
+            <a:avLst/>
+          </a:prstGeom>
+          <a:noFill/>
+          <a:ln w="57150">
+            <a:solidFill>
+              <a:srgbClr val="FE4447"/>
+            </a:solidFill>
+            <a:prstDash val="solid"/>
+          </a:ln>
+        </p:spPr>
+      </p:sp>
+      <p:sp>
+        <p:nvSpPr>
+          <p:cNvPr id="6" name="Text 4"/>
+          <p:cNvSpPr/>
+          <p:nvPr/>
+        </p:nvSpPr>
+        <p:spPr>
+          <a:xfrm>
+            <a:off x="692051" y="1074093"/>
+            <a:ext cx="7973389" cy="230981"/>
+          </a:xfrm>
+          <a:prstGeom prst="rect">
+            <a:avLst/>
+          </a:prstGeom>
+          <a:noFill/>
+          <a:ln/>
+        </p:spPr>
+        <p:txBody>
+          <a:bodyPr wrap="square" lIns="0" tIns="0" rIns="0" bIns="0" rtlCol="0" anchor="t"/>
+          <a:lstStyle/>
+          <a:p>
+            <a:pPr algn="l" indent="0" marL="0">
+              <a:lnSpc>
+                <a:spcPts val="1820"/>
+              </a:lnSpc>
+              <a:spcBef>
+                <a:spcPts val="300"/>
+              </a:spcBef>
+              <a:spcAft>
+                <a:spcPts val="300"/>
+              </a:spcAft>
+              <a:buNone/>
+            </a:pPr>
+            <a:r>
+              <a:rPr lang="en-US" sz="1300" b="1" i="1" dirty="0">
+                <a:solidFill>
+                  <a:srgbClr val="1C2833"/>
+                </a:solidFill>
+                <a:latin typeface="Georgia" pitchFamily="34" charset="0"/>
+                <a:ea typeface="Georgia" pitchFamily="34" charset="-122"/>
+                <a:cs typeface="Georgia" pitchFamily="34" charset="-120"/>
+              </a:rPr>
+              <a:t>Today is build day.</a:t>
+            </a:r>
+            <a:endParaRPr lang="en-US" sz="1300" dirty="0"/>
+          </a:p>
+        </p:txBody>
+      </p:sp>
+      <p:sp>
+        <p:nvSpPr>
+          <p:cNvPr id="7" name="Text 5"/>
+          <p:cNvSpPr/>
+          <p:nvPr/>
+        </p:nvSpPr>
+        <p:spPr>
+          <a:xfrm>
+            <a:off x="692051" y="1343174"/>
+            <a:ext cx="7973389" cy="230981"/>
+          </a:xfrm>
+          <a:prstGeom prst="rect">
+            <a:avLst/>
+          </a:prstGeom>
+          <a:noFill/>
+          <a:ln/>
+        </p:spPr>
+        <p:txBody>
+          <a:bodyPr wrap="square" lIns="0" tIns="0" rIns="0" bIns="0" rtlCol="0" anchor="t"/>
+          <a:lstStyle/>
+          <a:p>
+            <a:pPr algn="l" indent="0" marL="0">
+              <a:lnSpc>
+                <a:spcPts val="1820"/>
+              </a:lnSpc>
+              <a:spcBef>
+                <a:spcPts val="300"/>
+              </a:spcBef>
+              <a:spcAft>
+                <a:spcPts val="300"/>
+              </a:spcAft>
+              <a:buNone/>
+            </a:pPr>
+            <a:r>
+              <a:rPr lang="en-US" sz="1300" i="1" dirty="0">
+                <a:solidFill>
+                  <a:srgbClr val="1C2833"/>
+                </a:solidFill>
+                <a:latin typeface="Georgia" pitchFamily="34" charset="0"/>
+                <a:ea typeface="Georgia" pitchFamily="34" charset="-122"/>
+                <a:cs typeface="Georgia" pitchFamily="34" charset="-120"/>
+              </a:rPr>
+              <a:t>By the end of this class, your pair (or you, if solo) should have:</a:t>
+            </a:r>
+            <a:endParaRPr lang="en-US" sz="1300" dirty="0"/>
+          </a:p>
+        </p:txBody>
+      </p:sp>
+      <p:sp>
+        <p:nvSpPr>
+          <p:cNvPr id="8" name="Text 6"/>
+          <p:cNvSpPr/>
+          <p:nvPr/>
+        </p:nvSpPr>
+        <p:spPr>
+          <a:xfrm>
+            <a:off x="692051" y="1612255"/>
+            <a:ext cx="7973389" cy="230981"/>
+          </a:xfrm>
+          <a:prstGeom prst="rect">
+            <a:avLst/>
+          </a:prstGeom>
+          <a:noFill/>
+          <a:ln/>
+        </p:spPr>
+        <p:txBody>
+          <a:bodyPr wrap="square" lIns="0" tIns="0" rIns="0" bIns="0" rtlCol="0" anchor="t"/>
+          <a:lstStyle/>
+          <a:p>
+            <a:pPr algn="l" indent="0" marL="0">
+              <a:lnSpc>
+                <a:spcPts val="1820"/>
+              </a:lnSpc>
+              <a:spcBef>
+                <a:spcPts val="300"/>
+              </a:spcBef>
+              <a:spcAft>
+                <a:spcPts val="300"/>
+              </a:spcAft>
+              <a:buNone/>
+            </a:pPr>
+            <a:r>
+              <a:rPr lang="en-US" sz="1300" i="1" dirty="0">
+                <a:solidFill>
+                  <a:srgbClr val="1C2833"/>
+                </a:solidFill>
+                <a:latin typeface="Georgia" pitchFamily="34" charset="0"/>
+                <a:ea typeface="Georgia" pitchFamily="34" charset="-122"/>
+                <a:cs typeface="Georgia" pitchFamily="34" charset="-120"/>
+              </a:rPr>
+              <a:t>A one-paragraph plan in writing.</a:t>
+            </a:r>
+            <a:endParaRPr lang="en-US" sz="1300" dirty="0"/>
+          </a:p>
+        </p:txBody>
+      </p:sp>
+      <p:sp>
+        <p:nvSpPr>
+          <p:cNvPr id="9" name="Text 7"/>
+          <p:cNvSpPr/>
+          <p:nvPr/>
+        </p:nvSpPr>
+        <p:spPr>
+          <a:xfrm>
+            <a:off x="692051" y="1881336"/>
+            <a:ext cx="7973389" cy="230981"/>
+          </a:xfrm>
+          <a:prstGeom prst="rect">
+            <a:avLst/>
+          </a:prstGeom>
+          <a:noFill/>
+          <a:ln/>
+        </p:spPr>
+        <p:txBody>
+          <a:bodyPr wrap="square" lIns="0" tIns="0" rIns="0" bIns="0" rtlCol="0" anchor="t"/>
+          <a:lstStyle/>
+          <a:p>
+            <a:pPr algn="l" indent="0" marL="0">
+              <a:lnSpc>
+                <a:spcPts val="1820"/>
+              </a:lnSpc>
+              <a:spcBef>
+                <a:spcPts val="300"/>
+              </a:spcBef>
+              <a:spcAft>
+                <a:spcPts val="300"/>
+              </a:spcAft>
+              <a:buNone/>
+            </a:pPr>
+            <a:r>
+              <a:rPr lang="en-US" sz="1300" i="1" dirty="0">
+                <a:solidFill>
+                  <a:srgbClr val="1C2833"/>
+                </a:solidFill>
+                <a:latin typeface="Georgia" pitchFamily="34" charset="0"/>
+                <a:ea typeface="Georgia" pitchFamily="34" charset="-122"/>
+                <a:cs typeface="Georgia" pitchFamily="34" charset="-120"/>
+              </a:rPr>
+              <a:t>A first-draft artefact — poster sketch, slide outline, video storyboard.</a:t>
+            </a:r>
+            <a:endParaRPr lang="en-US" sz="1300" dirty="0"/>
+          </a:p>
+        </p:txBody>
+      </p:sp>
+      <p:sp>
+        <p:nvSpPr>
+          <p:cNvPr id="10" name="Text 8"/>
+          <p:cNvSpPr/>
+          <p:nvPr/>
+        </p:nvSpPr>
+        <p:spPr>
+          <a:xfrm>
+            <a:off x="692051" y="2150418"/>
+            <a:ext cx="7973389" cy="230981"/>
+          </a:xfrm>
+          <a:prstGeom prst="rect">
+            <a:avLst/>
+          </a:prstGeom>
+          <a:noFill/>
+          <a:ln/>
+        </p:spPr>
+        <p:txBody>
+          <a:bodyPr wrap="square" lIns="0" tIns="0" rIns="0" bIns="0" rtlCol="0" anchor="t"/>
+          <a:lstStyle/>
+          <a:p>
+            <a:pPr algn="l" indent="0" marL="0">
+              <a:lnSpc>
+                <a:spcPts val="1820"/>
+              </a:lnSpc>
+              <a:spcBef>
+                <a:spcPts val="300"/>
+              </a:spcBef>
+              <a:spcAft>
+                <a:spcPts val="300"/>
+              </a:spcAft>
+              <a:buNone/>
+            </a:pPr>
+            <a:r>
+              <a:rPr lang="en-US" sz="1300" i="1" dirty="0">
+                <a:solidFill>
+                  <a:srgbClr val="1C2833"/>
+                </a:solidFill>
+                <a:latin typeface="Georgia" pitchFamily="34" charset="0"/>
+                <a:ea typeface="Georgia" pitchFamily="34" charset="-122"/>
+                <a:cs typeface="Georgia" pitchFamily="34" charset="-120"/>
+              </a:rPr>
+              <a:t>Your source named, on the artefact.</a:t>
+            </a:r>
+            <a:endParaRPr lang="en-US" sz="1300" dirty="0"/>
+          </a:p>
+        </p:txBody>
+      </p:sp>
+      <p:sp>
+        <p:nvSpPr>
+          <p:cNvPr id="11" name="Text 9"/>
+          <p:cNvSpPr/>
+          <p:nvPr/>
+        </p:nvSpPr>
+        <p:spPr>
+          <a:xfrm>
+            <a:off x="692051" y="2419499"/>
+            <a:ext cx="7973389" cy="230981"/>
+          </a:xfrm>
+          <a:prstGeom prst="rect">
+            <a:avLst/>
+          </a:prstGeom>
+          <a:noFill/>
+          <a:ln/>
+        </p:spPr>
+        <p:txBody>
+          <a:bodyPr wrap="square" lIns="0" tIns="0" rIns="0" bIns="0" rtlCol="0" anchor="t"/>
+          <a:lstStyle/>
+          <a:p>
+            <a:pPr algn="l" indent="0" marL="0">
+              <a:lnSpc>
+                <a:spcPts val="1820"/>
+              </a:lnSpc>
+              <a:spcBef>
+                <a:spcPts val="300"/>
+              </a:spcBef>
+              <a:spcAft>
+                <a:spcPts val="300"/>
+              </a:spcAft>
+              <a:buNone/>
+            </a:pPr>
+            <a:r>
+              <a:rPr lang="en-US" sz="1300" i="1" dirty="0">
+                <a:solidFill>
+                  <a:srgbClr val="1C2833"/>
+                </a:solidFill>
+                <a:latin typeface="Georgia" pitchFamily="34" charset="0"/>
+                <a:ea typeface="Georgia" pitchFamily="34" charset="-122"/>
+                <a:cs typeface="Georgia" pitchFamily="34" charset="-120"/>
+              </a:rPr>
+              <a:t>Tomorrow you refine. Day 10 you present.</a:t>
+            </a:r>
+            <a:endParaRPr lang="en-US" sz="1300" dirty="0"/>
+          </a:p>
+        </p:txBody>
+      </p:sp>
+      <p:sp>
+        <p:nvSpPr>
+          <p:cNvPr id="12" name="Text 10"/>
+          <p:cNvSpPr/>
+          <p:nvPr/>
+        </p:nvSpPr>
+        <p:spPr>
+          <a:xfrm>
+            <a:off x="406301" y="4434929"/>
+            <a:ext cx="8498026" cy="213271"/>
+          </a:xfrm>
+          <a:prstGeom prst="rect">
+            <a:avLst/>
+          </a:prstGeom>
+          <a:noFill/>
+          <a:ln/>
+        </p:spPr>
+        <p:txBody>
+          <a:bodyPr wrap="square" lIns="0" tIns="0" rIns="0" bIns="0" rtlCol="0" anchor="t"/>
+          <a:lstStyle/>
+          <a:p>
+            <a:pPr algn="l" indent="0" marL="0">
+              <a:lnSpc>
+                <a:spcPts val="1680"/>
+              </a:lnSpc>
+              <a:spcBef>
+                <a:spcPts val="300"/>
+              </a:spcBef>
+              <a:spcAft>
+                <a:spcPts val="300"/>
+              </a:spcAft>
+              <a:buNone/>
+            </a:pPr>
+            <a:r>
+              <a:rPr lang="en-US" sz="1200" dirty="0">
+                <a:solidFill>
+                  <a:srgbClr val="1C2833"/>
+                </a:solidFill>
+                <a:latin typeface="Arial" pitchFamily="34" charset="0"/>
+                <a:ea typeface="Arial" pitchFamily="34" charset="-122"/>
+                <a:cs typeface="Arial" pitchFamily="34" charset="-120"/>
+              </a:rPr>
+              <a:t>Middle ·  · IKS Curriculum</a:t>
+            </a:r>
+            <a:endParaRPr lang="en-US" sz="1200" dirty="0"/>
+          </a:p>
+        </p:txBody>
+      </p:sp>
+    </p:spTree>
+  </p:cSld>
+  <p:clrMapOvr>
+    <a:masterClrMapping/>
+  </p:clrMapOvr>
+</p:sld>
+</file>
+
+<file path=ppt/slides/slide15.xml><?xml version="1.0" encoding="utf-8"?>
+<p:sld xmlns:a="http://schemas.openxmlformats.org/drawingml/2006/main" xmlns:r="http://schemas.openxmlformats.org/officeDocument/2006/relationships" xmlns:p="http://schemas.openxmlformats.org/presentationml/2006/main">
+  <p:cSld name="Slide 15">
+    <p:bg>
+      <p:bgPr>
+        <a:solidFill>
+          <a:srgbClr val="FFFFFF"/>
+        </a:solidFill>
+      </p:bgPr>
+    </p:bg>
+    <p:spTree>
+      <p:nvGrpSpPr>
+        <p:cNvPr id="1" name=""/>
+        <p:cNvGrpSpPr/>
+        <p:nvPr/>
+      </p:nvGrpSpPr>
+      <p:grpSpPr>
+        <a:xfrm>
+          <a:off x="0" y="0"/>
+          <a:ext cx="0" cy="0"/>
+          <a:chOff x="0" y="0"/>
+          <a:chExt cx="0" cy="0"/>
+        </a:xfrm>
+      </p:grpSpPr>
+      <p:sp>
+        <p:nvSpPr>
+          <p:cNvPr id="2" name="Text 0"/>
+          <p:cNvSpPr/>
+          <p:nvPr/>
+        </p:nvSpPr>
+        <p:spPr>
+          <a:xfrm>
+            <a:off x="0" y="0"/>
+            <a:ext cx="9144000" cy="101501"/>
+          </a:xfrm>
+          <a:prstGeom prst="rect">
+            <a:avLst/>
+          </a:prstGeom>
+          <a:solidFill>
+            <a:srgbClr val="277884"/>
+          </a:solidFill>
+          <a:ln/>
+        </p:spPr>
+        <p:txBody>
+          <a:bodyPr wrap="square" rtlCol="0" anchor="ctr"/>
+          <a:lstStyle/>
+          <a:p>
+            <a:pPr indent="0" marL="0">
+              <a:buNone/>
+            </a:pPr>
+            <a:endParaRPr lang="en-US" dirty="0"/>
+          </a:p>
+        </p:txBody>
+      </p:sp>
+      <p:sp>
+        <p:nvSpPr>
+          <p:cNvPr id="3" name="Text 1"/>
+          <p:cNvSpPr/>
+          <p:nvPr/>
+        </p:nvSpPr>
+        <p:spPr>
+          <a:xfrm>
+            <a:off x="406301" y="457051"/>
+            <a:ext cx="8498026" cy="274290"/>
+          </a:xfrm>
+          <a:prstGeom prst="rect">
+            <a:avLst/>
+          </a:prstGeom>
+          <a:noFill/>
+          <a:ln/>
+        </p:spPr>
+        <p:txBody>
+          <a:bodyPr wrap="square" lIns="0" tIns="0" rIns="0" bIns="0" rtlCol="0" anchor="t"/>
+          <a:lstStyle/>
+          <a:p>
+            <a:pPr algn="l" indent="0" marL="0">
+              <a:lnSpc>
+                <a:spcPts val="2160"/>
+              </a:lnSpc>
+              <a:spcBef>
+                <a:spcPts val="600"/>
+              </a:spcBef>
+              <a:spcAft>
+                <a:spcPts val="800"/>
+              </a:spcAft>
+              <a:buNone/>
+            </a:pPr>
+            <a:r>
+              <a:rPr lang="en-US" sz="1800" b="1" dirty="0">
+                <a:solidFill>
+                  <a:srgbClr val="FE4447"/>
+                </a:solidFill>
+                <a:latin typeface="Georgia" pitchFamily="34" charset="0"/>
+                <a:ea typeface="Georgia" pitchFamily="34" charset="-122"/>
+                <a:cs typeface="Georgia" pitchFamily="34" charset="-120"/>
+              </a:rPr>
+              <a:t>Homework</a:t>
+            </a:r>
+            <a:endParaRPr lang="en-US" sz="1800" dirty="0"/>
+          </a:p>
+        </p:txBody>
+      </p:sp>
+      <p:sp>
+        <p:nvSpPr>
+          <p:cNvPr id="4" name="Text 2"/>
+          <p:cNvSpPr/>
+          <p:nvPr/>
+        </p:nvSpPr>
+        <p:spPr>
+          <a:xfrm>
+            <a:off x="634901" y="883593"/>
+            <a:ext cx="8102798" cy="525661"/>
+          </a:xfrm>
+          <a:prstGeom prst="rect">
+            <a:avLst/>
+          </a:prstGeom>
+          <a:noFill/>
+          <a:ln/>
+        </p:spPr>
+        <p:txBody>
+          <a:bodyPr wrap="square" lIns="0" tIns="0" rIns="0" bIns="0" rtlCol="0" anchor="t"/>
+          <a:lstStyle/>
+          <a:p>
+            <a:pPr algn="l" marL="342900" indent="-342900">
+              <a:lnSpc>
+                <a:spcPts val="1620"/>
+              </a:lnSpc>
+              <a:spcAft>
+                <a:spcPts val="300"/>
+              </a:spcAft>
+              <a:buSzPct val="100000"/>
+              <a:buChar char="•"/>
+            </a:pPr>
+            <a:r>
+              <a:rPr lang="en-US" sz="1200" dirty="0">
+                <a:solidFill>
+                  <a:srgbClr val="1C2833"/>
+                </a:solidFill>
+                <a:latin typeface="Arial" pitchFamily="34" charset="0"/>
+                <a:ea typeface="Arial" pitchFamily="34" charset="-122"/>
+                <a:cs typeface="Arial" pitchFamily="34" charset="-120"/>
+              </a:rPr>
+              <a:t>Continue the Moon diary (you have 2 nights left).</a:t>
+            </a:r>
+            <a:endParaRPr lang="en-US" sz="1200" dirty="0"/>
+          </a:p>
+          <a:p>
+            <a:pPr algn="l" marL="342900" indent="-342900">
+              <a:lnSpc>
+                <a:spcPts val="1620"/>
+              </a:lnSpc>
+              <a:spcAft>
+                <a:spcPts val="300"/>
+              </a:spcAft>
+              <a:buSzPct val="100000"/>
+              <a:buChar char="•"/>
+            </a:pPr>
+            <a:r>
+              <a:rPr lang="en-US" sz="1200" dirty="0">
+                <a:solidFill>
+                  <a:srgbClr val="1C2833"/>
+                </a:solidFill>
+                <a:latin typeface="Arial" pitchFamily="34" charset="0"/>
+                <a:ea typeface="Arial" pitchFamily="34" charset="-122"/>
+                <a:cs typeface="Arial" pitchFamily="34" charset="-120"/>
+              </a:rPr>
+              <a:t>Finish at home what you couldn't finish in class. Don't </a:t>
+            </a:r>
+            <a:pPr algn="l" indent="0" marL="0">
+              <a:lnSpc>
+                <a:spcPts val="1620"/>
+              </a:lnSpc>
+              <a:spcAft>
+                <a:spcPts val="300"/>
+              </a:spcAft>
+              <a:buNone/>
+            </a:pPr>
+            <a:r>
+              <a:rPr lang="en-US" sz="1200" i="1" dirty="0">
+                <a:solidFill>
+                  <a:srgbClr val="1C2833"/>
+                </a:solidFill>
+                <a:latin typeface="Arial" pitchFamily="34" charset="0"/>
+                <a:ea typeface="Arial" pitchFamily="34" charset="-122"/>
+                <a:cs typeface="Arial" pitchFamily="34" charset="-120"/>
+              </a:rPr>
+              <a:t>start</a:t>
+            </a:r>
+            <a:pPr algn="l" indent="0" marL="0">
+              <a:lnSpc>
+                <a:spcPts val="1620"/>
+              </a:lnSpc>
+              <a:spcAft>
+                <a:spcPts val="300"/>
+              </a:spcAft>
+              <a:buNone/>
+            </a:pPr>
+            <a:r>
+              <a:rPr lang="en-US" sz="1200" dirty="0">
+                <a:solidFill>
+                  <a:srgbClr val="1C2833"/>
+                </a:solidFill>
+                <a:latin typeface="Arial" pitchFamily="34" charset="0"/>
+                <a:ea typeface="Arial" pitchFamily="34" charset="-122"/>
+                <a:cs typeface="Arial" pitchFamily="34" charset="-120"/>
+              </a:rPr>
+              <a:t> something new — refine.</a:t>
+            </a:r>
+            <a:endParaRPr lang="en-US" sz="1200" dirty="0"/>
+          </a:p>
+        </p:txBody>
+      </p:sp>
+      <p:sp>
+        <p:nvSpPr>
+          <p:cNvPr id="5" name="Text 3"/>
+          <p:cNvSpPr/>
+          <p:nvPr/>
+        </p:nvSpPr>
+        <p:spPr>
+          <a:xfrm>
+            <a:off x="406301" y="4434929"/>
+            <a:ext cx="8498026" cy="213271"/>
+          </a:xfrm>
+          <a:prstGeom prst="rect">
+            <a:avLst/>
+          </a:prstGeom>
+          <a:noFill/>
+          <a:ln/>
+        </p:spPr>
+        <p:txBody>
+          <a:bodyPr wrap="square" lIns="0" tIns="0" rIns="0" bIns="0" rtlCol="0" anchor="t"/>
+          <a:lstStyle/>
+          <a:p>
+            <a:pPr algn="l" indent="0" marL="0">
+              <a:lnSpc>
+                <a:spcPts val="1680"/>
+              </a:lnSpc>
+              <a:spcBef>
+                <a:spcPts val="300"/>
+              </a:spcBef>
+              <a:spcAft>
+                <a:spcPts val="300"/>
+              </a:spcAft>
+              <a:buNone/>
+            </a:pPr>
+            <a:r>
+              <a:rPr lang="en-US" sz="1200" dirty="0">
+                <a:solidFill>
+                  <a:srgbClr val="1C2833"/>
+                </a:solidFill>
+                <a:latin typeface="Arial" pitchFamily="34" charset="0"/>
+                <a:ea typeface="Arial" pitchFamily="34" charset="-122"/>
+                <a:cs typeface="Arial" pitchFamily="34" charset="-120"/>
+              </a:rPr>
+              <a:t>Middle ·  · IKS Curriculum</a:t>
+            </a:r>
+            <a:endParaRPr lang="en-US" sz="1200" dirty="0"/>
+          </a:p>
+        </p:txBody>
+      </p:sp>
+    </p:spTree>
+  </p:cSld>
+  <p:clrMapOvr>
+    <a:masterClrMapping/>
+  </p:clrMapOvr>
+</p:sld>
+</file>
+
+<file path=ppt/slides/slide16.xml><?xml version="1.0" encoding="utf-8"?>
+<p:sld xmlns:a="http://schemas.openxmlformats.org/drawingml/2006/main" xmlns:r="http://schemas.openxmlformats.org/officeDocument/2006/relationships" xmlns:p="http://schemas.openxmlformats.org/presentationml/2006/main">
+  <p:cSld name="Slide 16">
+    <p:bg>
+      <p:bgPr>
+        <a:solidFill>
+          <a:srgbClr val="FFFFFF"/>
+        </a:solidFill>
+      </p:bgPr>
+    </p:bg>
+    <p:spTree>
+      <p:nvGrpSpPr>
+        <p:cNvPr id="1" name=""/>
+        <p:cNvGrpSpPr/>
+        <p:nvPr/>
+      </p:nvGrpSpPr>
+      <p:grpSpPr>
+        <a:xfrm>
+          <a:off x="0" y="0"/>
+          <a:ext cx="0" cy="0"/>
+          <a:chOff x="0" y="0"/>
+          <a:chExt cx="0" cy="0"/>
+        </a:xfrm>
+      </p:grpSpPr>
+      <p:sp>
+        <p:nvSpPr>
+          <p:cNvPr id="2" name="Text 0"/>
+          <p:cNvSpPr/>
+          <p:nvPr/>
+        </p:nvSpPr>
+        <p:spPr>
+          <a:xfrm>
+            <a:off x="0" y="0"/>
+            <a:ext cx="9144000" cy="101501"/>
+          </a:xfrm>
+          <a:prstGeom prst="rect">
+            <a:avLst/>
+          </a:prstGeom>
+          <a:solidFill>
+            <a:srgbClr val="277884"/>
+          </a:solidFill>
+          <a:ln/>
+        </p:spPr>
+        <p:txBody>
+          <a:bodyPr wrap="square" rtlCol="0" anchor="ctr"/>
+          <a:lstStyle/>
+          <a:p>
+            <a:pPr indent="0" marL="0">
+              <a:buNone/>
+            </a:pPr>
+            <a:endParaRPr lang="en-US" dirty="0"/>
+          </a:p>
+        </p:txBody>
+      </p:sp>
+      <p:sp>
+        <p:nvSpPr>
+          <p:cNvPr id="3" name="Text 1"/>
+          <p:cNvSpPr/>
+          <p:nvPr/>
+        </p:nvSpPr>
+        <p:spPr>
+          <a:xfrm>
+            <a:off x="406301" y="457051"/>
+            <a:ext cx="8498026" cy="274290"/>
+          </a:xfrm>
+          <a:prstGeom prst="rect">
+            <a:avLst/>
+          </a:prstGeom>
+          <a:noFill/>
+          <a:ln/>
+        </p:spPr>
+        <p:txBody>
+          <a:bodyPr wrap="square" lIns="0" tIns="0" rIns="0" bIns="0" rtlCol="0" anchor="t"/>
+          <a:lstStyle/>
+          <a:p>
+            <a:pPr algn="l" indent="0" marL="0">
+              <a:lnSpc>
+                <a:spcPts val="2160"/>
+              </a:lnSpc>
+              <a:spcBef>
+                <a:spcPts val="600"/>
+              </a:spcBef>
+              <a:spcAft>
+                <a:spcPts val="800"/>
+              </a:spcAft>
+              <a:buNone/>
+            </a:pPr>
+            <a:r>
+              <a:rPr lang="en-US" sz="1800" b="1" dirty="0">
+                <a:solidFill>
+                  <a:srgbClr val="FE4447"/>
+                </a:solidFill>
+                <a:latin typeface="Georgia" pitchFamily="34" charset="0"/>
+                <a:ea typeface="Georgia" pitchFamily="34" charset="-122"/>
+                <a:cs typeface="Georgia" pitchFamily="34" charset="-120"/>
+              </a:rPr>
+              <a:t>Differentiation</a:t>
+            </a:r>
+            <a:endParaRPr lang="en-US" sz="1800" dirty="0"/>
+          </a:p>
+        </p:txBody>
+      </p:sp>
+      <p:sp>
+        <p:nvSpPr>
+          <p:cNvPr id="4" name="Text 2"/>
+          <p:cNvSpPr/>
+          <p:nvPr/>
+        </p:nvSpPr>
+        <p:spPr>
+          <a:xfrm>
+            <a:off x="634901" y="883593"/>
+            <a:ext cx="8102798" cy="937022"/>
+          </a:xfrm>
+          <a:prstGeom prst="rect">
+            <a:avLst/>
+          </a:prstGeom>
+          <a:noFill/>
+          <a:ln/>
+        </p:spPr>
+        <p:txBody>
+          <a:bodyPr wrap="square" lIns="0" tIns="0" rIns="0" bIns="0" rtlCol="0" anchor="t"/>
+          <a:lstStyle/>
+          <a:p>
+            <a:pPr algn="l" marL="342900" indent="-342900">
+              <a:lnSpc>
+                <a:spcPts val="1620"/>
+              </a:lnSpc>
+              <a:spcAft>
+                <a:spcPts val="300"/>
+              </a:spcAft>
+              <a:buSzPct val="100000"/>
+              <a:buChar char="•"/>
+            </a:pPr>
+            <a:r>
+              <a:rPr lang="en-US" sz="1200" b="1" dirty="0">
+                <a:solidFill>
+                  <a:srgbClr val="1C2833"/>
+                </a:solidFill>
+                <a:latin typeface="Arial" pitchFamily="34" charset="0"/>
+                <a:ea typeface="Arial" pitchFamily="34" charset="-122"/>
+                <a:cs typeface="Arial" pitchFamily="34" charset="-120"/>
+              </a:rPr>
+              <a:t>One tier up:</a:t>
+            </a:r>
+            <a:pPr algn="l" indent="0" marL="0">
+              <a:lnSpc>
+                <a:spcPts val="1620"/>
+              </a:lnSpc>
+              <a:spcAft>
+                <a:spcPts val="300"/>
+              </a:spcAft>
+              <a:buNone/>
+            </a:pPr>
+            <a:r>
+              <a:rPr lang="en-US" sz="1200" dirty="0">
+                <a:solidFill>
+                  <a:srgbClr val="1C2833"/>
+                </a:solidFill>
+                <a:latin typeface="Arial" pitchFamily="34" charset="0"/>
+                <a:ea typeface="Arial" pitchFamily="34" charset="-122"/>
+                <a:cs typeface="Arial" pitchFamily="34" charset="-120"/>
+              </a:rPr>
+              <a:t> Add a second citation. Two sources is a stronger project — for instance, paraphrase the </a:t>
+            </a:r>
+            <a:pPr algn="l" indent="0" marL="0">
+              <a:lnSpc>
+                <a:spcPts val="1620"/>
+              </a:lnSpc>
+              <a:spcAft>
+                <a:spcPts val="300"/>
+              </a:spcAft>
+              <a:buNone/>
+            </a:pPr>
+            <a:r>
+              <a:rPr lang="en-US" sz="1200" i="1" dirty="0">
+                <a:solidFill>
+                  <a:srgbClr val="1C2833"/>
+                </a:solidFill>
+                <a:latin typeface="Arial" pitchFamily="34" charset="0"/>
+                <a:ea typeface="Arial" pitchFamily="34" charset="-122"/>
+                <a:cs typeface="Arial" pitchFamily="34" charset="-120"/>
+              </a:rPr>
+              <a:t>Sūrya-siddhānta</a:t>
+            </a:r>
+            <a:pPr algn="l" indent="0" marL="0">
+              <a:lnSpc>
+                <a:spcPts val="1620"/>
+              </a:lnSpc>
+              <a:spcAft>
+                <a:spcPts val="300"/>
+              </a:spcAft>
+              <a:buNone/>
+            </a:pPr>
+            <a:r>
+              <a:rPr lang="en-US" sz="1200" dirty="0">
+                <a:solidFill>
+                  <a:srgbClr val="1C2833"/>
+                </a:solidFill>
+                <a:latin typeface="Arial" pitchFamily="34" charset="0"/>
+                <a:ea typeface="Arial" pitchFamily="34" charset="-122"/>
+                <a:cs typeface="Arial" pitchFamily="34" charset="-120"/>
+              </a:rPr>
+              <a:t> AND cite NASA's phase calendar.</a:t>
+            </a:r>
+            <a:endParaRPr lang="en-US" sz="1200" dirty="0"/>
+          </a:p>
+          <a:p>
+            <a:pPr algn="l" marL="342900" indent="-342900">
+              <a:lnSpc>
+                <a:spcPts val="1620"/>
+              </a:lnSpc>
+              <a:spcAft>
+                <a:spcPts val="300"/>
+              </a:spcAft>
+              <a:buSzPct val="100000"/>
+              <a:buChar char="•"/>
+            </a:pPr>
+            <a:r>
+              <a:rPr lang="en-US" sz="1200" b="1" dirty="0">
+                <a:solidFill>
+                  <a:srgbClr val="1C2833"/>
+                </a:solidFill>
+                <a:latin typeface="Arial" pitchFamily="34" charset="0"/>
+                <a:ea typeface="Arial" pitchFamily="34" charset="-122"/>
+                <a:cs typeface="Arial" pitchFamily="34" charset="-120"/>
+              </a:rPr>
+              <a:t>One tier down:</a:t>
+            </a:r>
+            <a:pPr algn="l" indent="0" marL="0">
+              <a:lnSpc>
+                <a:spcPts val="1620"/>
+              </a:lnSpc>
+              <a:spcAft>
+                <a:spcPts val="300"/>
+              </a:spcAft>
+              <a:buNone/>
+            </a:pPr>
+            <a:r>
+              <a:rPr lang="en-US" sz="1200" dirty="0">
+                <a:solidFill>
+                  <a:srgbClr val="1C2833"/>
+                </a:solidFill>
+                <a:latin typeface="Arial" pitchFamily="34" charset="0"/>
+                <a:ea typeface="Arial" pitchFamily="34" charset="-122"/>
+                <a:cs typeface="Arial" pitchFamily="34" charset="-120"/>
+              </a:rPr>
+              <a:t> Reduce scope. Pick ONE phenomenon (phases, eclipses, or the calendar) and explain it in one paragraph + one diagram. That's a complete project.</a:t>
+            </a:r>
+            <a:endParaRPr lang="en-US" sz="1200" dirty="0"/>
+          </a:p>
+        </p:txBody>
+      </p:sp>
+      <p:sp>
+        <p:nvSpPr>
+          <p:cNvPr id="5" name="Text 3"/>
+          <p:cNvSpPr/>
+          <p:nvPr/>
+        </p:nvSpPr>
+        <p:spPr>
+          <a:xfrm>
+            <a:off x="406301" y="4434929"/>
+            <a:ext cx="8498026" cy="213271"/>
+          </a:xfrm>
+          <a:prstGeom prst="rect">
+            <a:avLst/>
+          </a:prstGeom>
+          <a:noFill/>
+          <a:ln/>
+        </p:spPr>
+        <p:txBody>
+          <a:bodyPr wrap="square" lIns="0" tIns="0" rIns="0" bIns="0" rtlCol="0" anchor="t"/>
+          <a:lstStyle/>
+          <a:p>
+            <a:pPr algn="l" indent="0" marL="0">
+              <a:lnSpc>
+                <a:spcPts val="1680"/>
+              </a:lnSpc>
+              <a:spcBef>
+                <a:spcPts val="300"/>
+              </a:spcBef>
+              <a:spcAft>
+                <a:spcPts val="300"/>
+              </a:spcAft>
+              <a:buNone/>
+            </a:pPr>
+            <a:r>
+              <a:rPr lang="en-US" sz="1200" dirty="0">
+                <a:solidFill>
+                  <a:srgbClr val="1C2833"/>
+                </a:solidFill>
+                <a:latin typeface="Arial" pitchFamily="34" charset="0"/>
+                <a:ea typeface="Arial" pitchFamily="34" charset="-122"/>
+                <a:cs typeface="Arial" pitchFamily="34" charset="-120"/>
+              </a:rPr>
+              <a:t>Middle ·  · IKS Curriculum</a:t>
+            </a:r>
+            <a:endParaRPr lang="en-US" sz="1200" dirty="0"/>
+          </a:p>
+        </p:txBody>
+      </p:sp>
+    </p:spTree>
+  </p:cSld>
+  <p:clrMapOvr>
+    <a:masterClrMapping/>
+  </p:clrMapOvr>
+</p:sld>
+</file>
+
+<file path=ppt/slides/slide17.xml><?xml version="1.0" encoding="utf-8"?>
+<p:sld xmlns:a="http://schemas.openxmlformats.org/drawingml/2006/main" xmlns:r="http://schemas.openxmlformats.org/officeDocument/2006/relationships" xmlns:p="http://schemas.openxmlformats.org/presentationml/2006/main">
+  <p:cSld name="Slide 17">
+    <p:bg>
+      <p:bgPr>
+        <a:solidFill>
+          <a:srgbClr val="FFFFFF"/>
+        </a:solidFill>
+      </p:bgPr>
+    </p:bg>
+    <p:spTree>
+      <p:nvGrpSpPr>
+        <p:cNvPr id="1" name=""/>
+        <p:cNvGrpSpPr/>
+        <p:nvPr/>
+      </p:nvGrpSpPr>
+      <p:grpSpPr>
+        <a:xfrm>
+          <a:off x="0" y="0"/>
+          <a:ext cx="0" cy="0"/>
+          <a:chOff x="0" y="0"/>
+          <a:chExt cx="0" cy="0"/>
+        </a:xfrm>
+      </p:grpSpPr>
+      <p:sp>
+        <p:nvSpPr>
+          <p:cNvPr id="2" name="Text 0"/>
+          <p:cNvSpPr/>
+          <p:nvPr/>
+        </p:nvSpPr>
+        <p:spPr>
+          <a:xfrm>
+            <a:off x="0" y="0"/>
+            <a:ext cx="9144000" cy="101501"/>
+          </a:xfrm>
+          <a:prstGeom prst="rect">
+            <a:avLst/>
+          </a:prstGeom>
+          <a:solidFill>
+            <a:srgbClr val="277884"/>
+          </a:solidFill>
+          <a:ln/>
+        </p:spPr>
+        <p:txBody>
+          <a:bodyPr wrap="square" rtlCol="0" anchor="ctr"/>
+          <a:lstStyle/>
+          <a:p>
+            <a:pPr indent="0" marL="0">
+              <a:buNone/>
+            </a:pPr>
+            <a:endParaRPr lang="en-US" dirty="0"/>
+          </a:p>
+        </p:txBody>
+      </p:sp>
+      <p:sp>
+        <p:nvSpPr>
+          <p:cNvPr id="3" name="Text 1"/>
+          <p:cNvSpPr/>
+          <p:nvPr/>
+        </p:nvSpPr>
+        <p:spPr>
+          <a:xfrm>
+            <a:off x="406301" y="457051"/>
+            <a:ext cx="8498026" cy="274290"/>
+          </a:xfrm>
+          <a:prstGeom prst="rect">
+            <a:avLst/>
+          </a:prstGeom>
+          <a:noFill/>
+          <a:ln/>
+        </p:spPr>
+        <p:txBody>
+          <a:bodyPr wrap="square" lIns="0" tIns="0" rIns="0" bIns="0" rtlCol="0" anchor="t"/>
+          <a:lstStyle/>
+          <a:p>
+            <a:pPr algn="l" indent="0" marL="0">
+              <a:lnSpc>
+                <a:spcPts val="2160"/>
+              </a:lnSpc>
+              <a:spcBef>
+                <a:spcPts val="600"/>
+              </a:spcBef>
+              <a:spcAft>
+                <a:spcPts val="800"/>
+              </a:spcAft>
+              <a:buNone/>
+            </a:pPr>
+            <a:r>
+              <a:rPr lang="en-US" sz="1800" b="1" dirty="0">
+                <a:solidFill>
+                  <a:srgbClr val="FE4447"/>
+                </a:solidFill>
+                <a:latin typeface="Georgia" pitchFamily="34" charset="0"/>
+                <a:ea typeface="Georgia" pitchFamily="34" charset="-122"/>
+                <a:cs typeface="Georgia" pitchFamily="34" charset="-120"/>
+              </a:rPr>
+              <a:t>Teacher notes</a:t>
+            </a:r>
+            <a:endParaRPr lang="en-US" sz="1800" dirty="0"/>
+          </a:p>
+        </p:txBody>
+      </p:sp>
+      <p:sp>
+        <p:nvSpPr>
+          <p:cNvPr id="4" name="Text 2"/>
+          <p:cNvSpPr/>
+          <p:nvPr/>
+        </p:nvSpPr>
+        <p:spPr>
+          <a:xfrm>
+            <a:off x="634901" y="883593"/>
+            <a:ext cx="8102798" cy="1180802"/>
+          </a:xfrm>
+          <a:prstGeom prst="rect">
+            <a:avLst/>
+          </a:prstGeom>
+          <a:noFill/>
+          <a:ln/>
+        </p:spPr>
+        <p:txBody>
+          <a:bodyPr wrap="square" lIns="0" tIns="0" rIns="0" bIns="0" rtlCol="0" anchor="t"/>
+          <a:lstStyle/>
+          <a:p>
+            <a:pPr algn="l" marL="342900" indent="-342900">
+              <a:lnSpc>
+                <a:spcPts val="1620"/>
+              </a:lnSpc>
+              <a:spcAft>
+                <a:spcPts val="300"/>
+              </a:spcAft>
+              <a:buSzPct val="100000"/>
+              <a:buChar char="•"/>
+            </a:pPr>
+            <a:r>
+              <a:rPr lang="en-US" sz="1200" dirty="0">
+                <a:solidFill>
+                  <a:srgbClr val="1C2833"/>
+                </a:solidFill>
+                <a:latin typeface="Arial" pitchFamily="34" charset="0"/>
+                <a:ea typeface="Arial" pitchFamily="34" charset="-122"/>
+                <a:cs typeface="Arial" pitchFamily="34" charset="-120"/>
+              </a:rPr>
+              <a:t>Pairs that are still "researching" by minute 20 are stuck. Push them to start sketching/drafting even if incomplete. The artefact concretises the thinking.</a:t>
+            </a:r>
+            <a:endParaRPr lang="en-US" sz="1200" dirty="0"/>
+          </a:p>
+          <a:p>
+            <a:pPr algn="l" marL="342900" indent="-342900">
+              <a:lnSpc>
+                <a:spcPts val="1620"/>
+              </a:lnSpc>
+              <a:spcAft>
+                <a:spcPts val="300"/>
+              </a:spcAft>
+              <a:buSzPct val="100000"/>
+              <a:buChar char="•"/>
+            </a:pPr>
+            <a:r>
+              <a:rPr lang="en-US" sz="1200" dirty="0">
+                <a:solidFill>
+                  <a:srgbClr val="1C2833"/>
+                </a:solidFill>
+                <a:latin typeface="Arial" pitchFamily="34" charset="0"/>
+                <a:ea typeface="Arial" pitchFamily="34" charset="-122"/>
+                <a:cs typeface="Arial" pitchFamily="34" charset="-120"/>
+              </a:rPr>
+              <a:t>Phone-photo submissions are fine. Photograph the draft poster against a wall; submit by email or via shared drive.</a:t>
+            </a:r>
+            <a:endParaRPr lang="en-US" sz="1200" dirty="0"/>
+          </a:p>
+          <a:p>
+            <a:pPr algn="l" marL="342900" indent="-342900">
+              <a:lnSpc>
+                <a:spcPts val="1620"/>
+              </a:lnSpc>
+              <a:spcAft>
+                <a:spcPts val="300"/>
+              </a:spcAft>
+              <a:buSzPct val="100000"/>
+              <a:buChar char="•"/>
+            </a:pPr>
+            <a:r>
+              <a:rPr lang="en-US" sz="1200" dirty="0">
+                <a:solidFill>
+                  <a:srgbClr val="1C2833"/>
+                </a:solidFill>
+                <a:latin typeface="Arial" pitchFamily="34" charset="0"/>
+                <a:ea typeface="Arial" pitchFamily="34" charset="-122"/>
+                <a:cs typeface="Arial" pitchFamily="34" charset="-120"/>
+              </a:rPr>
+              <a:t>A common failure mode: pairs over-design the visual and under-write the explanation. Push toward writing the </a:t>
+            </a:r>
+            <a:pPr algn="l" indent="0" marL="0">
+              <a:lnSpc>
+                <a:spcPts val="1620"/>
+              </a:lnSpc>
+              <a:spcAft>
+                <a:spcPts val="300"/>
+              </a:spcAft>
+              <a:buNone/>
+            </a:pPr>
+            <a:r>
+              <a:rPr lang="en-US" sz="1200" b="1" dirty="0">
+                <a:solidFill>
+                  <a:srgbClr val="1C2833"/>
+                </a:solidFill>
+                <a:latin typeface="Arial" pitchFamily="34" charset="0"/>
+                <a:ea typeface="Arial" pitchFamily="34" charset="-122"/>
+                <a:cs typeface="Arial" pitchFamily="34" charset="-120"/>
+              </a:rPr>
+              <a:t>3-minute script</a:t>
+            </a:r>
+            <a:pPr algn="l" indent="0" marL="0">
+              <a:lnSpc>
+                <a:spcPts val="1620"/>
+              </a:lnSpc>
+              <a:spcAft>
+                <a:spcPts val="300"/>
+              </a:spcAft>
+              <a:buNone/>
+            </a:pPr>
+            <a:r>
+              <a:rPr lang="en-US" sz="1200" dirty="0">
+                <a:solidFill>
+                  <a:srgbClr val="1C2833"/>
+                </a:solidFill>
+                <a:latin typeface="Arial" pitchFamily="34" charset="0"/>
+                <a:ea typeface="Arial" pitchFamily="34" charset="-122"/>
+                <a:cs typeface="Arial" pitchFamily="34" charset="-120"/>
+              </a:rPr>
+              <a:t> by end of class.</a:t>
+            </a:r>
+            <a:endParaRPr lang="en-US" sz="1200" dirty="0"/>
+          </a:p>
+        </p:txBody>
+      </p:sp>
+      <p:sp>
+        <p:nvSpPr>
+          <p:cNvPr id="5" name="Text 3"/>
+          <p:cNvSpPr/>
+          <p:nvPr/>
+        </p:nvSpPr>
+        <p:spPr>
+          <a:xfrm>
+            <a:off x="406301" y="4434929"/>
+            <a:ext cx="8498026" cy="213271"/>
+          </a:xfrm>
+          <a:prstGeom prst="rect">
+            <a:avLst/>
+          </a:prstGeom>
+          <a:noFill/>
+          <a:ln/>
+        </p:spPr>
+        <p:txBody>
+          <a:bodyPr wrap="square" lIns="0" tIns="0" rIns="0" bIns="0" rtlCol="0" anchor="t"/>
+          <a:lstStyle/>
+          <a:p>
+            <a:pPr algn="l" indent="0" marL="0">
+              <a:lnSpc>
+                <a:spcPts val="1680"/>
+              </a:lnSpc>
+              <a:spcBef>
+                <a:spcPts val="300"/>
+              </a:spcBef>
+              <a:spcAft>
+                <a:spcPts val="300"/>
+              </a:spcAft>
+              <a:buNone/>
+            </a:pPr>
+            <a:r>
+              <a:rPr lang="en-US" sz="1200" dirty="0">
+                <a:solidFill>
+                  <a:srgbClr val="1C2833"/>
+                </a:solidFill>
+                <a:latin typeface="Arial" pitchFamily="34" charset="0"/>
+                <a:ea typeface="Arial" pitchFamily="34" charset="-122"/>
+                <a:cs typeface="Arial" pitchFamily="34" charset="-120"/>
+              </a:rPr>
+              <a:t>Middle ·  · IKS Curriculum</a:t>
+            </a:r>
+            <a:endParaRPr lang="en-US" sz="1200" dirty="0"/>
+          </a:p>
+        </p:txBody>
+      </p:sp>
+    </p:spTree>
+  </p:cSld>
+  <p:clrMapOvr>
+    <a:masterClrMapping/>
+  </p:clrMapOvr>
+</p:sld>
+</file>
+
+<file path=ppt/slides/slide18.xml><?xml version="1.0" encoding="utf-8"?>
+<p:sld xmlns:a="http://schemas.openxmlformats.org/drawingml/2006/main" xmlns:r="http://schemas.openxmlformats.org/officeDocument/2006/relationships" xmlns:p="http://schemas.openxmlformats.org/presentationml/2006/main">
+  <p:cSld name="Slide 18">
+    <p:bg>
+      <p:bgPr>
+        <a:solidFill>
+          <a:srgbClr val="FFFFFF"/>
+        </a:solidFill>
+      </p:bgPr>
+    </p:bg>
+    <p:spTree>
+      <p:nvGrpSpPr>
+        <p:cNvPr id="1" name=""/>
+        <p:cNvGrpSpPr/>
+        <p:nvPr/>
+      </p:nvGrpSpPr>
+      <p:grpSpPr>
+        <a:xfrm>
+          <a:off x="0" y="0"/>
+          <a:ext cx="0" cy="0"/>
+          <a:chOff x="0" y="0"/>
+          <a:chExt cx="0" cy="0"/>
+        </a:xfrm>
+      </p:grpSpPr>
+      <p:sp>
+        <p:nvSpPr>
+          <p:cNvPr id="2" name="Text 0"/>
+          <p:cNvSpPr/>
+          <p:nvPr/>
+        </p:nvSpPr>
+        <p:spPr>
+          <a:xfrm>
+            <a:off x="0" y="0"/>
+            <a:ext cx="9144000" cy="101501"/>
+          </a:xfrm>
+          <a:prstGeom prst="rect">
+            <a:avLst/>
+          </a:prstGeom>
+          <a:solidFill>
+            <a:srgbClr val="277884"/>
+          </a:solidFill>
+          <a:ln/>
+        </p:spPr>
+        <p:txBody>
+          <a:bodyPr wrap="square" rtlCol="0" anchor="ctr"/>
+          <a:lstStyle/>
+          <a:p>
+            <a:pPr indent="0" marL="0">
+              <a:buNone/>
+            </a:pPr>
+            <a:endParaRPr lang="en-US" dirty="0"/>
+          </a:p>
+        </p:txBody>
+      </p:sp>
+      <p:sp>
+        <p:nvSpPr>
+          <p:cNvPr id="3" name="Text 1"/>
+          <p:cNvSpPr/>
+          <p:nvPr/>
+        </p:nvSpPr>
+        <p:spPr>
+          <a:xfrm>
+            <a:off x="406301" y="457051"/>
+            <a:ext cx="8498026" cy="274290"/>
+          </a:xfrm>
+          <a:prstGeom prst="rect">
+            <a:avLst/>
+          </a:prstGeom>
+          <a:noFill/>
+          <a:ln/>
+        </p:spPr>
+        <p:txBody>
+          <a:bodyPr wrap="square" lIns="0" tIns="0" rIns="0" bIns="0" rtlCol="0" anchor="t"/>
+          <a:lstStyle/>
+          <a:p>
+            <a:pPr algn="l" indent="0" marL="0">
+              <a:lnSpc>
+                <a:spcPts val="2160"/>
+              </a:lnSpc>
+              <a:spcBef>
+                <a:spcPts val="600"/>
+              </a:spcBef>
+              <a:spcAft>
+                <a:spcPts val="800"/>
+              </a:spcAft>
+              <a:buNone/>
+            </a:pPr>
+            <a:r>
+              <a:rPr lang="en-US" sz="1800" b="1" dirty="0">
+                <a:solidFill>
+                  <a:srgbClr val="FE4447"/>
+                </a:solidFill>
+                <a:latin typeface="Georgia" pitchFamily="34" charset="0"/>
+                <a:ea typeface="Georgia" pitchFamily="34" charset="-122"/>
+                <a:cs typeface="Georgia" pitchFamily="34" charset="-120"/>
+              </a:rPr>
+              <a:t>Citation(s) used in this lesson</a:t>
+            </a:r>
+            <a:endParaRPr lang="en-US" sz="1800" dirty="0"/>
+          </a:p>
+        </p:txBody>
+      </p:sp>
+      <p:sp>
+        <p:nvSpPr>
+          <p:cNvPr id="4" name="Text 2"/>
+          <p:cNvSpPr/>
+          <p:nvPr/>
+        </p:nvSpPr>
+        <p:spPr>
+          <a:xfrm>
+            <a:off x="634901" y="883593"/>
+            <a:ext cx="8102798" cy="544711"/>
+          </a:xfrm>
+          <a:prstGeom prst="rect">
+            <a:avLst/>
+          </a:prstGeom>
+          <a:noFill/>
+          <a:ln/>
+        </p:spPr>
+        <p:txBody>
+          <a:bodyPr wrap="square" lIns="0" tIns="0" rIns="0" bIns="0" rtlCol="0" anchor="t"/>
+          <a:lstStyle/>
+          <a:p>
+            <a:pPr algn="l" marL="342900" indent="-342900">
+              <a:lnSpc>
+                <a:spcPts val="1620"/>
+              </a:lnSpc>
+              <a:spcAft>
+                <a:spcPts val="300"/>
+              </a:spcAft>
+              <a:buSzPct val="100000"/>
+              <a:buChar char="•"/>
+            </a:pPr>
+            <a:r>
+              <a:rPr lang="en-US" sz="1200" dirty="0">
+                <a:solidFill>
+                  <a:srgbClr val="1C2833"/>
+                </a:solidFill>
+                <a:latin typeface="Arial" pitchFamily="34" charset="0"/>
+                <a:ea typeface="Arial" pitchFamily="34" charset="-122"/>
+                <a:cs typeface="Arial" pitchFamily="34" charset="-120"/>
+              </a:rPr>
+              <a:t>The rubric (</a:t>
+            </a:r>
+            <a:pPr algn="l" indent="0" marL="0">
+              <a:lnSpc>
+                <a:spcPts val="1620"/>
+              </a:lnSpc>
+              <a:spcAft>
+                <a:spcPts val="300"/>
+              </a:spcAft>
+              <a:buNone/>
+            </a:pPr>
+            <a:r>
+              <a:rPr lang="en-US" sz="1200" dirty="0">
+                <a:solidFill>
+                  <a:srgbClr val="1C2833"/>
+                </a:solidFill>
+                <a:latin typeface="Arial" pitchFamily="34" charset="0"/>
+                <a:ea typeface="Arial" pitchFamily="34" charset="-122"/>
+                <a:cs typeface="Arial" pitchFamily="34" charset="-120"/>
+              </a:rPr>
               <a:t>assessments/rubric.md</a:t>
             </a:r>
             <a:pPr algn="l" indent="0" marL="0">
               <a:lnSpc>
-                <a:spcPts val="1680"/>
-              </a:lnSpc>
-              <a:spcBef>
-                <a:spcPts val="300"/>
-              </a:spcBef>
+                <a:spcPts val="1620"/>
+              </a:lnSpc>
               <a:spcAft>
                 <a:spcPts val="300"/>
               </a:spcAft>
@@ -2994,7 +5559,31 @@
                 <a:ea typeface="Arial" pitchFamily="34" charset="-122"/>
                 <a:cs typeface="Arial" pitchFamily="34" charset="-120"/>
               </a:rPr>
-              <a:t>) is the primary reference for what "good" looks like. – Source-quality reminder: ONLY real sources. No invented citations.</a:t>
+              <a:t>) is the primary reference for what "good" looks like.</a:t>
+            </a:r>
+            <a:endParaRPr lang="en-US" sz="1200" dirty="0"/>
+          </a:p>
+          <a:p>
+            <a:pPr algn="l" marL="342900" indent="-342900">
+              <a:lnSpc>
+                <a:spcPts val="1620"/>
+              </a:lnSpc>
+              <a:spcAft>
+                <a:spcPts val="300"/>
+              </a:spcAft>
+              <a:buSzPct val="100000"/>
+              <a:buChar char="•"/>
+            </a:pPr>
+            <a:r>
+              <a:rPr lang="en-US" sz="1200" dirty="0">
+                <a:solidFill>
+                  <a:srgbClr val="1C2833"/>
+                </a:solidFill>
+                <a:latin typeface="Arial" pitchFamily="34" charset="0"/>
+                <a:ea typeface="Arial" pitchFamily="34" charset="-122"/>
+                <a:cs typeface="Arial" pitchFamily="34" charset="-120"/>
+              </a:rPr>
+              <a:t>Source-quality reminder: ONLY real sources. No invented citations.</a:t>
             </a:r>
             <a:endParaRPr lang="en-US" sz="1200" dirty="0"/>
           </a:p>
@@ -3152,7 +5741,7 @@
                 <a:ea typeface="Georgia" pitchFamily="34" charset="-122"/>
                 <a:cs typeface="Georgia" pitchFamily="34" charset="-120"/>
               </a:rPr>
-              <a:t>Materials</a:t>
+              <a:t>Learning objective</a:t>
             </a:r>
             <a:endParaRPr lang="en-US" sz="1800" dirty="0"/>
           </a:p>
@@ -3167,7 +5756,7 @@
         <p:spPr>
           <a:xfrm>
             <a:off x="406301" y="870942"/>
-            <a:ext cx="8498026" cy="649337"/>
+            <a:ext cx="8498026" cy="426541"/>
           </a:xfrm>
           <a:prstGeom prst="rect">
             <a:avLst/>
@@ -3200,99 +5789,7 @@
                 <a:ea typeface="Arial" pitchFamily="34" charset="-122"/>
                 <a:cs typeface="Arial" pitchFamily="34" charset="-120"/>
               </a:rPr>
-              <a:t>– Project supplies for whatever format students chose: poster paper, markers, A4 sheets, laptops, art supplies – Printed copy of the rubric (</a:t>
-            </a:r>
-            <a:pPr algn="l" indent="0" marL="0">
-              <a:lnSpc>
-                <a:spcPts val="1680"/>
-              </a:lnSpc>
-              <a:spcBef>
-                <a:spcPts val="300"/>
-              </a:spcBef>
-              <a:spcAft>
-                <a:spcPts val="300"/>
-              </a:spcAft>
-              <a:buNone/>
-            </a:pPr>
-            <a:r>
-              <a:rPr lang="en-US" sz="1200" dirty="0">
-                <a:solidFill>
-                  <a:srgbClr val="1C2833"/>
-                </a:solidFill>
-                <a:latin typeface="Arial" pitchFamily="34" charset="0"/>
-                <a:ea typeface="Arial" pitchFamily="34" charset="-122"/>
-                <a:cs typeface="Arial" pitchFamily="34" charset="-120"/>
-              </a:rPr>
-              <a:t>assessments/rubric.md</a:t>
-            </a:r>
-            <a:pPr algn="l" indent="0" marL="0">
-              <a:lnSpc>
-                <a:spcPts val="1680"/>
-              </a:lnSpc>
-              <a:spcBef>
-                <a:spcPts val="300"/>
-              </a:spcBef>
-              <a:spcAft>
-                <a:spcPts val="300"/>
-              </a:spcAft>
-              <a:buNone/>
-            </a:pPr>
-            <a:r>
-              <a:rPr lang="en-US" sz="1200" dirty="0">
-                <a:solidFill>
-                  <a:srgbClr val="1C2833"/>
-                </a:solidFill>
-                <a:latin typeface="Arial" pitchFamily="34" charset="0"/>
-                <a:ea typeface="Arial" pitchFamily="34" charset="-122"/>
-                <a:cs typeface="Arial" pitchFamily="34" charset="-120"/>
-              </a:rPr>
-              <a:t>) — one per pair – The class </a:t>
-            </a:r>
-            <a:pPr algn="l" indent="0" marL="0">
-              <a:lnSpc>
-                <a:spcPts val="1680"/>
-              </a:lnSpc>
-              <a:spcBef>
-                <a:spcPts val="300"/>
-              </a:spcBef>
-              <a:spcAft>
-                <a:spcPts val="300"/>
-              </a:spcAft>
-              <a:buNone/>
-            </a:pPr>
-            <a:r>
-              <a:rPr lang="en-US" sz="1200" i="1" dirty="0">
-                <a:solidFill>
-                  <a:srgbClr val="1C2833"/>
-                </a:solidFill>
-                <a:latin typeface="Arial" pitchFamily="34" charset="0"/>
-                <a:ea typeface="Arial" pitchFamily="34" charset="-122"/>
-                <a:cs typeface="Arial" pitchFamily="34" charset="-120"/>
-              </a:rPr>
-              <a:t>pañcāṅga</a:t>
-            </a:r>
-            <a:pPr algn="l" indent="0" marL="0">
-              <a:lnSpc>
-                <a:spcPts val="1680"/>
-              </a:lnSpc>
-              <a:spcBef>
-                <a:spcPts val="300"/>
-              </a:spcBef>
-              <a:spcAft>
-                <a:spcPts val="300"/>
-              </a:spcAft>
-              <a:buNone/>
-            </a:pPr>
-            <a:r>
-              <a:rPr lang="en-US" sz="1200" dirty="0">
-                <a:solidFill>
-                  <a:srgbClr val="1C2833"/>
-                </a:solidFill>
-                <a:latin typeface="Arial" pitchFamily="34" charset="0"/>
-                <a:ea typeface="Arial" pitchFamily="34" charset="-122"/>
-                <a:cs typeface="Arial" pitchFamily="34" charset="-120"/>
-              </a:rPr>
-              <a:t> (for reference) – Days 1–7 student notebooks (their own diaries + worksheets)</a:t>
+              <a:t>Students will produce a one-paragraph project plan with element (lunar topic), format, audience, and citation; and complete a first-draft artefact (poster sketch / video storyboard / slide outline).</a:t>
             </a:r>
             <a:endParaRPr lang="en-US" sz="1200" dirty="0"/>
           </a:p>
@@ -3450,7 +5947,7 @@
                 <a:ea typeface="Georgia" pitchFamily="34" charset="-122"/>
                 <a:cs typeface="Georgia" pitchFamily="34" charset="-120"/>
               </a:rPr>
-              <a:t>Lesson flow</a:t>
+              <a:t>Materials</a:t>
             </a:r>
             <a:endParaRPr lang="en-US" sz="1800" dirty="0"/>
           </a:p>
@@ -3459,6 +5956,204 @@
       <p:sp>
         <p:nvSpPr>
           <p:cNvPr id="4" name="Text 2"/>
+          <p:cNvSpPr/>
+          <p:nvPr/>
+        </p:nvSpPr>
+        <p:spPr>
+          <a:xfrm>
+            <a:off x="634901" y="883593"/>
+            <a:ext cx="8102798" cy="1032272"/>
+          </a:xfrm>
+          <a:prstGeom prst="rect">
+            <a:avLst/>
+          </a:prstGeom>
+          <a:noFill/>
+          <a:ln/>
+        </p:spPr>
+        <p:txBody>
+          <a:bodyPr wrap="square" lIns="0" tIns="0" rIns="0" bIns="0" rtlCol="0" anchor="t"/>
+          <a:lstStyle/>
+          <a:p>
+            <a:pPr algn="l" marL="342900" indent="-342900">
+              <a:lnSpc>
+                <a:spcPts val="1620"/>
+              </a:lnSpc>
+              <a:spcAft>
+                <a:spcPts val="300"/>
+              </a:spcAft>
+              <a:buSzPct val="100000"/>
+              <a:buChar char="•"/>
+            </a:pPr>
+            <a:r>
+              <a:rPr lang="en-US" sz="1200" dirty="0">
+                <a:solidFill>
+                  <a:srgbClr val="1C2833"/>
+                </a:solidFill>
+                <a:latin typeface="Arial" pitchFamily="34" charset="0"/>
+                <a:ea typeface="Arial" pitchFamily="34" charset="-122"/>
+                <a:cs typeface="Arial" pitchFamily="34" charset="-120"/>
+              </a:rPr>
+              <a:t>Project supplies for whatever format students chose: poster paper, markers, A4 sheets, laptops, art supplies</a:t>
+            </a:r>
+            <a:endParaRPr lang="en-US" sz="1200" dirty="0"/>
+          </a:p>
+          <a:p>
+            <a:pPr algn="l" marL="342900" indent="-342900">
+              <a:lnSpc>
+                <a:spcPts val="1620"/>
+              </a:lnSpc>
+              <a:spcAft>
+                <a:spcPts val="300"/>
+              </a:spcAft>
+              <a:buSzPct val="100000"/>
+              <a:buChar char="•"/>
+            </a:pPr>
+            <a:r>
+              <a:rPr lang="en-US" sz="1200" dirty="0">
+                <a:solidFill>
+                  <a:srgbClr val="1C2833"/>
+                </a:solidFill>
+                <a:latin typeface="Arial" pitchFamily="34" charset="0"/>
+                <a:ea typeface="Arial" pitchFamily="34" charset="-122"/>
+                <a:cs typeface="Arial" pitchFamily="34" charset="-120"/>
+              </a:rPr>
+              <a:t>Printed copy of the rubric (</a:t>
+            </a:r>
+            <a:pPr algn="l" indent="0" marL="0">
+              <a:lnSpc>
+                <a:spcPts val="1620"/>
+              </a:lnSpc>
+              <a:spcAft>
+                <a:spcPts val="300"/>
+              </a:spcAft>
+              <a:buNone/>
+            </a:pPr>
+            <a:r>
+              <a:rPr lang="en-US" sz="1200" dirty="0">
+                <a:solidFill>
+                  <a:srgbClr val="1C2833"/>
+                </a:solidFill>
+                <a:latin typeface="Arial" pitchFamily="34" charset="0"/>
+                <a:ea typeface="Arial" pitchFamily="34" charset="-122"/>
+                <a:cs typeface="Arial" pitchFamily="34" charset="-120"/>
+              </a:rPr>
+              <a:t>assessments/rubric.md</a:t>
+            </a:r>
+            <a:pPr algn="l" indent="0" marL="0">
+              <a:lnSpc>
+                <a:spcPts val="1620"/>
+              </a:lnSpc>
+              <a:spcAft>
+                <a:spcPts val="300"/>
+              </a:spcAft>
+              <a:buNone/>
+            </a:pPr>
+            <a:r>
+              <a:rPr lang="en-US" sz="1200" dirty="0">
+                <a:solidFill>
+                  <a:srgbClr val="1C2833"/>
+                </a:solidFill>
+                <a:latin typeface="Arial" pitchFamily="34" charset="0"/>
+                <a:ea typeface="Arial" pitchFamily="34" charset="-122"/>
+                <a:cs typeface="Arial" pitchFamily="34" charset="-120"/>
+              </a:rPr>
+              <a:t>) — one per pair</a:t>
+            </a:r>
+            <a:endParaRPr lang="en-US" sz="1200" dirty="0"/>
+          </a:p>
+          <a:p>
+            <a:pPr algn="l" marL="342900" indent="-342900">
+              <a:lnSpc>
+                <a:spcPts val="1620"/>
+              </a:lnSpc>
+              <a:spcAft>
+                <a:spcPts val="300"/>
+              </a:spcAft>
+              <a:buSzPct val="100000"/>
+              <a:buChar char="•"/>
+            </a:pPr>
+            <a:r>
+              <a:rPr lang="en-US" sz="1200" dirty="0">
+                <a:solidFill>
+                  <a:srgbClr val="1C2833"/>
+                </a:solidFill>
+                <a:latin typeface="Arial" pitchFamily="34" charset="0"/>
+                <a:ea typeface="Arial" pitchFamily="34" charset="-122"/>
+                <a:cs typeface="Arial" pitchFamily="34" charset="-120"/>
+              </a:rPr>
+              <a:t>The class </a:t>
+            </a:r>
+            <a:pPr algn="l" indent="0" marL="0">
+              <a:lnSpc>
+                <a:spcPts val="1620"/>
+              </a:lnSpc>
+              <a:spcAft>
+                <a:spcPts val="300"/>
+              </a:spcAft>
+              <a:buNone/>
+            </a:pPr>
+            <a:r>
+              <a:rPr lang="en-US" sz="1200" i="1" dirty="0">
+                <a:solidFill>
+                  <a:srgbClr val="1C2833"/>
+                </a:solidFill>
+                <a:latin typeface="Arial" pitchFamily="34" charset="0"/>
+                <a:ea typeface="Arial" pitchFamily="34" charset="-122"/>
+                <a:cs typeface="Arial" pitchFamily="34" charset="-120"/>
+              </a:rPr>
+              <a:t>pañcāṅga</a:t>
+            </a:r>
+            <a:pPr algn="l" indent="0" marL="0">
+              <a:lnSpc>
+                <a:spcPts val="1620"/>
+              </a:lnSpc>
+              <a:spcAft>
+                <a:spcPts val="300"/>
+              </a:spcAft>
+              <a:buNone/>
+            </a:pPr>
+            <a:r>
+              <a:rPr lang="en-US" sz="1200" dirty="0">
+                <a:solidFill>
+                  <a:srgbClr val="1C2833"/>
+                </a:solidFill>
+                <a:latin typeface="Arial" pitchFamily="34" charset="0"/>
+                <a:ea typeface="Arial" pitchFamily="34" charset="-122"/>
+                <a:cs typeface="Arial" pitchFamily="34" charset="-120"/>
+              </a:rPr>
+              <a:t> (for reference)</a:t>
+            </a:r>
+            <a:endParaRPr lang="en-US" sz="1200" dirty="0"/>
+          </a:p>
+          <a:p>
+            <a:pPr algn="l" marL="342900" indent="-342900">
+              <a:lnSpc>
+                <a:spcPts val="1620"/>
+              </a:lnSpc>
+              <a:spcAft>
+                <a:spcPts val="300"/>
+              </a:spcAft>
+              <a:buSzPct val="100000"/>
+              <a:buChar char="•"/>
+            </a:pPr>
+            <a:r>
+              <a:rPr lang="en-US" sz="1200" dirty="0">
+                <a:solidFill>
+                  <a:srgbClr val="1C2833"/>
+                </a:solidFill>
+                <a:latin typeface="Arial" pitchFamily="34" charset="0"/>
+                <a:ea typeface="Arial" pitchFamily="34" charset="-122"/>
+                <a:cs typeface="Arial" pitchFamily="34" charset="-120"/>
+              </a:rPr>
+              <a:t>Days 1–7 student notebooks (their own diaries + worksheets)</a:t>
+            </a:r>
+            <a:endParaRPr lang="en-US" sz="1200" dirty="0"/>
+          </a:p>
+        </p:txBody>
+      </p:sp>
+      <p:sp>
+        <p:nvSpPr>
+          <p:cNvPr id="5" name="Text 3"/>
           <p:cNvSpPr/>
           <p:nvPr/>
         </p:nvSpPr>
@@ -3608,7 +6303,7 @@
                 <a:ea typeface="Georgia" pitchFamily="34" charset="-122"/>
                 <a:cs typeface="Georgia" pitchFamily="34" charset="-120"/>
               </a:rPr>
-              <a:t>Warm-up (5 min)</a:t>
+              <a:t>Lesson flow</a:t>
             </a:r>
             <a:endParaRPr lang="en-US" sz="1800" dirty="0"/>
           </a:p>
@@ -3617,123 +6312,6 @@
       <p:sp>
         <p:nvSpPr>
           <p:cNvPr id="4" name="Text 2"/>
-          <p:cNvSpPr/>
-          <p:nvPr/>
-        </p:nvSpPr>
-        <p:spPr>
-          <a:xfrm>
-            <a:off x="406301" y="870942"/>
-            <a:ext cx="8498026" cy="426541"/>
-          </a:xfrm>
-          <a:prstGeom prst="rect">
-            <a:avLst/>
-          </a:prstGeom>
-          <a:noFill/>
-          <a:ln/>
-        </p:spPr>
-        <p:txBody>
-          <a:bodyPr wrap="square" lIns="0" tIns="0" rIns="0" bIns="0" rtlCol="0" anchor="t"/>
-          <a:lstStyle/>
-          <a:p>
-            <a:pPr algn="l" indent="0" marL="0">
-              <a:lnSpc>
-                <a:spcPts val="1680"/>
-              </a:lnSpc>
-              <a:spcBef>
-                <a:spcPts val="300"/>
-              </a:spcBef>
-              <a:spcAft>
-                <a:spcPts val="300"/>
-              </a:spcAft>
-              <a:buNone/>
-            </a:pPr>
-            <a:r>
-              <a:rPr lang="en-US" sz="1200" dirty="0">
-                <a:solidFill>
-                  <a:srgbClr val="1C2833"/>
-                </a:solidFill>
-                <a:latin typeface="Arial" pitchFamily="34" charset="0"/>
-                <a:ea typeface="Arial" pitchFamily="34" charset="-122"/>
-                <a:cs typeface="Arial" pitchFamily="34" charset="-120"/>
-              </a:rPr>
-              <a:t>– Daily prompt: </a:t>
-            </a:r>
-            <a:pPr algn="l" indent="0" marL="0">
-              <a:lnSpc>
-                <a:spcPts val="1680"/>
-              </a:lnSpc>
-              <a:spcBef>
-                <a:spcPts val="300"/>
-              </a:spcBef>
-              <a:spcAft>
-                <a:spcPts val="300"/>
-              </a:spcAft>
-              <a:buNone/>
-            </a:pPr>
-            <a:r>
-              <a:rPr lang="en-US" sz="1200" i="1" dirty="0">
-                <a:solidFill>
-                  <a:srgbClr val="1C2833"/>
-                </a:solidFill>
-                <a:latin typeface="Arial" pitchFamily="34" charset="0"/>
-                <a:ea typeface="Arial" pitchFamily="34" charset="-122"/>
-                <a:cs typeface="Arial" pitchFamily="34" charset="-120"/>
-              </a:rPr>
-              <a:t>"Did you see the Moon last night? What tithi?"</a:t>
-            </a:r>
-            <a:pPr algn="l" indent="0" marL="0">
-              <a:lnSpc>
-                <a:spcPts val="1680"/>
-              </a:lnSpc>
-              <a:spcBef>
-                <a:spcPts val="300"/>
-              </a:spcBef>
-              <a:spcAft>
-                <a:spcPts val="300"/>
-              </a:spcAft>
-              <a:buNone/>
-            </a:pPr>
-            <a:r>
-              <a:rPr lang="en-US" sz="1200" dirty="0">
-                <a:solidFill>
-                  <a:srgbClr val="1C2833"/>
-                </a:solidFill>
-                <a:latin typeface="Arial" pitchFamily="34" charset="0"/>
-                <a:ea typeface="Arial" pitchFamily="34" charset="-122"/>
-                <a:cs typeface="Arial" pitchFamily="34" charset="-120"/>
-              </a:rPr>
-              <a:t> — 2 students share. – Hand each pair a printed rubric. </a:t>
-            </a:r>
-            <a:pPr algn="l" indent="0" marL="0">
-              <a:lnSpc>
-                <a:spcPts val="1680"/>
-              </a:lnSpc>
-              <a:spcBef>
-                <a:spcPts val="300"/>
-              </a:spcBef>
-              <a:spcAft>
-                <a:spcPts val="300"/>
-              </a:spcAft>
-              <a:buNone/>
-            </a:pPr>
-            <a:r>
-              <a:rPr lang="en-US" sz="1200" i="1" dirty="0">
-                <a:solidFill>
-                  <a:srgbClr val="1C2833"/>
-                </a:solidFill>
-                <a:latin typeface="Arial" pitchFamily="34" charset="0"/>
-                <a:ea typeface="Arial" pitchFamily="34" charset="-122"/>
-                <a:cs typeface="Arial" pitchFamily="34" charset="-120"/>
-              </a:rPr>
-              <a:t>"Read through the rubric — 4 minutes. Bring questions to me."</a:t>
-            </a:r>
-            <a:endParaRPr lang="en-US" sz="1200" dirty="0"/>
-          </a:p>
-        </p:txBody>
-      </p:sp>
-      <p:sp>
-        <p:nvSpPr>
-          <p:cNvPr id="5" name="Text 3"/>
           <p:cNvSpPr/>
           <p:nvPr/>
         </p:nvSpPr>
@@ -3883,7 +6461,7 @@
                 <a:ea typeface="Georgia" pitchFamily="34" charset="-122"/>
                 <a:cs typeface="Georgia" pitchFamily="34" charset="-120"/>
               </a:rPr>
-              <a:t>Core (5 min)</a:t>
+              <a:t>Warm-up (5 min)</a:t>
             </a:r>
             <a:endParaRPr lang="en-US" sz="1800" dirty="0"/>
           </a:p>
@@ -3897,8 +6475,8 @@
         </p:nvSpPr>
         <p:spPr>
           <a:xfrm>
-            <a:off x="406301" y="870942"/>
-            <a:ext cx="8498026" cy="213271"/>
+            <a:off x="634901" y="883593"/>
+            <a:ext cx="8102798" cy="525661"/>
           </a:xfrm>
           <a:prstGeom prst="rect">
             <a:avLst/>
@@ -3910,54 +6488,6 @@
           <a:bodyPr wrap="square" lIns="0" tIns="0" rIns="0" bIns="0" rtlCol="0" anchor="t"/>
           <a:lstStyle/>
           <a:p>
-            <a:pPr algn="l" indent="0" marL="0">
-              <a:lnSpc>
-                <a:spcPts val="1680"/>
-              </a:lnSpc>
-              <a:spcBef>
-                <a:spcPts val="300"/>
-              </a:spcBef>
-              <a:spcAft>
-                <a:spcPts val="300"/>
-              </a:spcAft>
-              <a:buNone/>
-            </a:pPr>
-            <a:r>
-              <a:rPr lang="en-US" sz="1200" dirty="0">
-                <a:solidFill>
-                  <a:srgbClr val="1C2833"/>
-                </a:solidFill>
-                <a:latin typeface="Arial" pitchFamily="34" charset="0"/>
-                <a:ea typeface="Arial" pitchFamily="34" charset="-122"/>
-                <a:cs typeface="Arial" pitchFamily="34" charset="-120"/>
-              </a:rPr>
-              <a:t>Take questions on the rubric. The most common questions:</a:t>
-            </a:r>
-            <a:endParaRPr lang="en-US" sz="1200" dirty="0"/>
-          </a:p>
-        </p:txBody>
-      </p:sp>
-      <p:sp>
-        <p:nvSpPr>
-          <p:cNvPr id="5" name="Text 3"/>
-          <p:cNvSpPr/>
-          <p:nvPr/>
-        </p:nvSpPr>
-        <p:spPr>
-          <a:xfrm>
-            <a:off x="634901" y="1173063"/>
-            <a:ext cx="8102798" cy="1386483"/>
-          </a:xfrm>
-          <a:prstGeom prst="rect">
-            <a:avLst/>
-          </a:prstGeom>
-          <a:noFill/>
-          <a:ln/>
-        </p:spPr>
-        <p:txBody>
-          <a:bodyPr wrap="square" lIns="0" tIns="0" rIns="0" bIns="0" rtlCol="0" anchor="t"/>
-          <a:lstStyle/>
-          <a:p>
             <a:pPr algn="l" marL="342900" indent="-342900">
               <a:lnSpc>
                 <a:spcPts val="1620"/>
@@ -3969,6 +6499,26 @@
               <a:buChar char="•"/>
             </a:pPr>
             <a:r>
+              <a:rPr lang="en-US" sz="1200" dirty="0">
+                <a:solidFill>
+                  <a:srgbClr val="1C2833"/>
+                </a:solidFill>
+                <a:latin typeface="Arial" pitchFamily="34" charset="0"/>
+                <a:ea typeface="Arial" pitchFamily="34" charset="-122"/>
+                <a:cs typeface="Arial" pitchFamily="34" charset="-120"/>
+              </a:rPr>
+              <a:t>Daily prompt: </a:t>
+            </a:r>
+            <a:pPr algn="l" indent="0" marL="0">
+              <a:lnSpc>
+                <a:spcPts val="1620"/>
+              </a:lnSpc>
+              <a:spcAft>
+                <a:spcPts val="300"/>
+              </a:spcAft>
+              <a:buNone/>
+            </a:pPr>
+            <a:r>
               <a:rPr lang="en-US" sz="1200" i="1" dirty="0">
                 <a:solidFill>
                   <a:srgbClr val="1C2833"/>
@@ -3977,7 +6527,7 @@
                 <a:ea typeface="Arial" pitchFamily="34" charset="-122"/>
                 <a:cs typeface="Arial" pitchFamily="34" charset="-120"/>
               </a:rPr>
-              <a:t>"Do we need to quote a verse?"</a:t>
+              <a:t>"Did you see the Moon last night? What tithi?"</a:t>
             </a:r>
             <a:pPr algn="l" indent="0" marL="0">
               <a:lnSpc>
@@ -3997,47 +6547,7 @@
                 <a:ea typeface="Arial" pitchFamily="34" charset="-122"/>
                 <a:cs typeface="Arial" pitchFamily="34" charset="-120"/>
               </a:rPr>
-              <a:t> — No. A paraphrase of the </a:t>
-            </a:r>
-            <a:pPr algn="l" indent="0" marL="0">
-              <a:lnSpc>
-                <a:spcPts val="1620"/>
-              </a:lnSpc>
-              <a:spcAft>
-                <a:spcPts val="300"/>
-              </a:spcAft>
-              <a:buNone/>
-            </a:pPr>
-            <a:r>
-              <a:rPr lang="en-US" sz="1200" i="1" dirty="0">
-                <a:solidFill>
-                  <a:srgbClr val="1C2833"/>
-                </a:solidFill>
-                <a:latin typeface="Arial" pitchFamily="34" charset="0"/>
-                <a:ea typeface="Arial" pitchFamily="34" charset="-122"/>
-                <a:cs typeface="Arial" pitchFamily="34" charset="-120"/>
-              </a:rPr>
-              <a:t>Sūrya-siddhānta</a:t>
-            </a:r>
-            <a:pPr algn="l" indent="0" marL="0">
-              <a:lnSpc>
-                <a:spcPts val="1620"/>
-              </a:lnSpc>
-              <a:spcAft>
-                <a:spcPts val="300"/>
-              </a:spcAft>
-              <a:buNone/>
-            </a:pPr>
-            <a:r>
-              <a:rPr lang="en-US" sz="1200" dirty="0">
-                <a:solidFill>
-                  <a:srgbClr val="1C2833"/>
-                </a:solidFill>
-                <a:latin typeface="Arial" pitchFamily="34" charset="0"/>
-                <a:ea typeface="Arial" pitchFamily="34" charset="-122"/>
-                <a:cs typeface="Arial" pitchFamily="34" charset="-120"/>
-              </a:rPr>
-              <a:t> (e.g. "the Sūrya-siddhānta defines a tithi as 12° of elongation") is enough. A NASA reference is also acceptable. The rubric cares that your source is real and named.</a:t>
+              <a:t> — 2 students share.</a:t>
             </a:r>
             <a:endParaRPr lang="en-US" sz="1200" dirty="0"/>
           </a:p>
@@ -4053,6 +6563,26 @@
               <a:buChar char="•"/>
             </a:pPr>
             <a:r>
+              <a:rPr lang="en-US" sz="1200" dirty="0">
+                <a:solidFill>
+                  <a:srgbClr val="1C2833"/>
+                </a:solidFill>
+                <a:latin typeface="Arial" pitchFamily="34" charset="0"/>
+                <a:ea typeface="Arial" pitchFamily="34" charset="-122"/>
+                <a:cs typeface="Arial" pitchFamily="34" charset="-120"/>
+              </a:rPr>
+              <a:t>Hand each pair a printed rubric. </a:t>
+            </a:r>
+            <a:pPr algn="l" indent="0" marL="0">
+              <a:lnSpc>
+                <a:spcPts val="1620"/>
+              </a:lnSpc>
+              <a:spcAft>
+                <a:spcPts val="300"/>
+              </a:spcAft>
+              <a:buNone/>
+            </a:pPr>
+            <a:r>
               <a:rPr lang="en-US" sz="1200" i="1" dirty="0">
                 <a:solidFill>
                   <a:srgbClr val="1C2833"/>
@@ -4061,79 +6591,15 @@
                 <a:ea typeface="Arial" pitchFamily="34" charset="-122"/>
                 <a:cs typeface="Arial" pitchFamily="34" charset="-120"/>
               </a:rPr>
-              <a:t>"Can we do TWO topics?"</a:t>
-            </a:r>
-            <a:pPr algn="l" indent="0" marL="0">
-              <a:lnSpc>
-                <a:spcPts val="1620"/>
-              </a:lnSpc>
-              <a:spcAft>
-                <a:spcPts val="300"/>
-              </a:spcAft>
-              <a:buNone/>
-            </a:pPr>
-            <a:r>
-              <a:rPr lang="en-US" sz="1200" dirty="0">
-                <a:solidFill>
-                  <a:srgbClr val="1C2833"/>
-                </a:solidFill>
-                <a:latin typeface="Arial" pitchFamily="34" charset="0"/>
-                <a:ea typeface="Arial" pitchFamily="34" charset="-122"/>
-                <a:cs typeface="Arial" pitchFamily="34" charset="-120"/>
-              </a:rPr>
-              <a:t> — One main topic. You may compare to a second briefly.</a:t>
+              <a:t>"Read through the rubric — 4 minutes. Bring questions to me."</a:t>
             </a:r>
             <a:endParaRPr lang="en-US" sz="1200" dirty="0"/>
           </a:p>
-          <a:p>
-            <a:pPr algn="l" marL="342900" indent="-342900">
-              <a:lnSpc>
-                <a:spcPts val="1620"/>
-              </a:lnSpc>
-              <a:spcAft>
-                <a:spcPts val="300"/>
-              </a:spcAft>
-              <a:buSzPct val="100000"/>
-              <a:buChar char="•"/>
-            </a:pPr>
-            <a:r>
-              <a:rPr lang="en-US" sz="1200" i="1" dirty="0">
-                <a:solidFill>
-                  <a:srgbClr val="1C2833"/>
-                </a:solidFill>
-                <a:latin typeface="Arial" pitchFamily="34" charset="0"/>
-                <a:ea typeface="Arial" pitchFamily="34" charset="-122"/>
-                <a:cs typeface="Arial" pitchFamily="34" charset="-120"/>
-              </a:rPr>
-              <a:t>"What if our diary is missing some nights (clouds)?"</a:t>
-            </a:r>
-            <a:pPr algn="l" indent="0" marL="0">
-              <a:lnSpc>
-                <a:spcPts val="1620"/>
-              </a:lnSpc>
-              <a:spcAft>
-                <a:spcPts val="300"/>
-              </a:spcAft>
-              <a:buNone/>
-            </a:pPr>
-            <a:r>
-              <a:rPr lang="en-US" sz="1200" dirty="0">
-                <a:solidFill>
-                  <a:srgbClr val="1C2833"/>
-                </a:solidFill>
-                <a:latin typeface="Arial" pitchFamily="34" charset="0"/>
-                <a:ea typeface="Arial" pitchFamily="34" charset="-122"/>
-                <a:cs typeface="Arial" pitchFamily="34" charset="-120"/>
-              </a:rPr>
-              <a:t> — Note "cloudy, predicted [shape]" for those nights. The diary still counts.</a:t>
-            </a:r>
-            <a:endParaRPr lang="en-US" sz="1200" dirty="0"/>
-          </a:p>
-        </p:txBody>
-      </p:sp>
-      <p:sp>
-        <p:nvSpPr>
-          <p:cNvPr id="6" name="Text 4"/>
+        </p:txBody>
+      </p:sp>
+      <p:sp>
+        <p:nvSpPr>
+          <p:cNvPr id="5" name="Text 3"/>
           <p:cNvSpPr/>
           <p:nvPr/>
         </p:nvSpPr>
@@ -4283,7 +6749,7 @@
                 <a:ea typeface="Georgia" pitchFamily="34" charset="-122"/>
                 <a:cs typeface="Georgia" pitchFamily="34" charset="-120"/>
               </a:rPr>
-              <a:t>Activity (30 min) — Build</a:t>
+              <a:t>Core (5 min)</a:t>
             </a:r>
             <a:endParaRPr lang="en-US" sz="1800" dirty="0"/>
           </a:p>
@@ -4331,7 +6797,7 @@
                 <a:ea typeface="Arial" pitchFamily="34" charset="-122"/>
                 <a:cs typeface="Arial" pitchFamily="34" charset="-120"/>
               </a:rPr>
-              <a:t>Pairs work on their projects. The teacher rotates and checks each pair has:</a:t>
+              <a:t>Take questions on the rubric. The most common questions:</a:t>
             </a:r>
             <a:endParaRPr lang="en-US" sz="1200" dirty="0"/>
           </a:p>
@@ -4345,515 +6811,7 @@
         </p:nvSpPr>
         <p:spPr>
           <a:xfrm>
-            <a:off x="634901" y="1173063"/>
-            <a:ext cx="8102798" cy="281880"/>
-          </a:xfrm>
-          <a:prstGeom prst="rect">
-            <a:avLst/>
-          </a:prstGeom>
-          <a:noFill/>
-          <a:ln/>
-        </p:spPr>
-        <p:txBody>
-          <a:bodyPr wrap="square" lIns="0" tIns="0" rIns="0" bIns="0" rtlCol="0" anchor="t"/>
-          <a:lstStyle/>
-          <a:p>
-            <a:pPr algn="l" marL="342900" indent="-342900">
-              <a:lnSpc>
-                <a:spcPts val="1620"/>
-              </a:lnSpc>
-              <a:spcAft>
-                <a:spcPts val="300"/>
-              </a:spcAft>
-              <a:buSzPct val="100000"/>
-              <a:buChar char="•"/>
-            </a:pPr>
-            <a:r>
-              <a:rPr lang="en-US" sz="1200" b="1" dirty="0">
-                <a:solidFill>
-                  <a:srgbClr val="1C2833"/>
-                </a:solidFill>
-                <a:latin typeface="Arial" pitchFamily="34" charset="0"/>
-                <a:ea typeface="Arial" pitchFamily="34" charset="-122"/>
-                <a:cs typeface="Arial" pitchFamily="34" charset="-120"/>
-              </a:rPr>
-              <a:t>Chosen topic</a:t>
-            </a:r>
-            <a:pPr algn="l" indent="0" marL="0">
-              <a:lnSpc>
-                <a:spcPts val="1620"/>
-              </a:lnSpc>
-              <a:spcAft>
-                <a:spcPts val="300"/>
-              </a:spcAft>
-              <a:buNone/>
-            </a:pPr>
-            <a:r>
-              <a:rPr lang="en-US" sz="1200" dirty="0">
-                <a:solidFill>
-                  <a:srgbClr val="1C2833"/>
-                </a:solidFill>
-                <a:latin typeface="Arial" pitchFamily="34" charset="0"/>
-                <a:ea typeface="Arial" pitchFamily="34" charset="-122"/>
-                <a:cs typeface="Arial" pitchFamily="34" charset="-120"/>
-              </a:rPr>
-              <a:t> — one of:</a:t>
-            </a:r>
-            <a:endParaRPr lang="en-US" sz="1200" dirty="0"/>
-          </a:p>
-        </p:txBody>
-      </p:sp>
-      <p:sp>
-        <p:nvSpPr>
-          <p:cNvPr id="6" name="Text 4"/>
-          <p:cNvSpPr/>
-          <p:nvPr/>
-        </p:nvSpPr>
-        <p:spPr>
-          <a:xfrm>
-            <a:off x="406301" y="1543794"/>
-            <a:ext cx="8498026" cy="639812"/>
-          </a:xfrm>
-          <a:prstGeom prst="rect">
-            <a:avLst/>
-          </a:prstGeom>
-          <a:noFill/>
-          <a:ln/>
-        </p:spPr>
-        <p:txBody>
-          <a:bodyPr wrap="square" lIns="0" tIns="0" rIns="0" bIns="0" rtlCol="0" anchor="t"/>
-          <a:lstStyle/>
-          <a:p>
-            <a:pPr algn="l" indent="0" marL="0">
-              <a:lnSpc>
-                <a:spcPts val="1680"/>
-              </a:lnSpc>
-              <a:spcBef>
-                <a:spcPts val="300"/>
-              </a:spcBef>
-              <a:spcAft>
-                <a:spcPts val="300"/>
-              </a:spcAft>
-              <a:buNone/>
-            </a:pPr>
-            <a:r>
-              <a:rPr lang="en-US" sz="1200" dirty="0">
-                <a:solidFill>
-                  <a:srgbClr val="1C2833"/>
-                </a:solidFill>
-                <a:latin typeface="Arial" pitchFamily="34" charset="0"/>
-                <a:ea typeface="Arial" pitchFamily="34" charset="-122"/>
-                <a:cs typeface="Arial" pitchFamily="34" charset="-120"/>
-              </a:rPr>
-              <a:t>– Moon phases (geometry and the 10-night diary visualised)    – Eclipses (why, when, safety)    – Tithi calendar (the one built on Day 4 + an explanation)    – Cross-cultural lunar calendars (preview of Day 9)    – Lunar months and festivals    – Adhika māsa (intercalary month)</a:t>
-            </a:r>
-            <a:endParaRPr lang="en-US" sz="1200" dirty="0"/>
-          </a:p>
-        </p:txBody>
-      </p:sp>
-      <p:sp>
-        <p:nvSpPr>
-          <p:cNvPr id="7" name="Text 5"/>
-          <p:cNvSpPr/>
-          <p:nvPr/>
-        </p:nvSpPr>
-        <p:spPr>
-          <a:xfrm>
-            <a:off x="634901" y="2272457"/>
-            <a:ext cx="8102798" cy="281880"/>
-          </a:xfrm>
-          <a:prstGeom prst="rect">
-            <a:avLst/>
-          </a:prstGeom>
-          <a:noFill/>
-          <a:ln/>
-        </p:spPr>
-        <p:txBody>
-          <a:bodyPr wrap="square" lIns="0" tIns="0" rIns="0" bIns="0" rtlCol="0" anchor="t"/>
-          <a:lstStyle/>
-          <a:p>
-            <a:pPr algn="l" marL="342900" indent="-342900">
-              <a:lnSpc>
-                <a:spcPts val="1620"/>
-              </a:lnSpc>
-              <a:spcAft>
-                <a:spcPts val="300"/>
-              </a:spcAft>
-              <a:buSzPct val="100000"/>
-              <a:buChar char="•"/>
-            </a:pPr>
-            <a:r>
-              <a:rPr lang="en-US" sz="1200" b="1" dirty="0">
-                <a:solidFill>
-                  <a:srgbClr val="1C2833"/>
-                </a:solidFill>
-                <a:latin typeface="Arial" pitchFamily="34" charset="0"/>
-                <a:ea typeface="Arial" pitchFamily="34" charset="-122"/>
-                <a:cs typeface="Arial" pitchFamily="34" charset="-120"/>
-              </a:rPr>
-              <a:t>Chosen format</a:t>
-            </a:r>
-            <a:pPr algn="l" indent="0" marL="0">
-              <a:lnSpc>
-                <a:spcPts val="1620"/>
-              </a:lnSpc>
-              <a:spcAft>
-                <a:spcPts val="300"/>
-              </a:spcAft>
-              <a:buNone/>
-            </a:pPr>
-            <a:r>
-              <a:rPr lang="en-US" sz="1200" dirty="0">
-                <a:solidFill>
-                  <a:srgbClr val="1C2833"/>
-                </a:solidFill>
-                <a:latin typeface="Arial" pitchFamily="34" charset="0"/>
-                <a:ea typeface="Arial" pitchFamily="34" charset="-122"/>
-                <a:cs typeface="Arial" pitchFamily="34" charset="-120"/>
-              </a:rPr>
-              <a:t> — one of:</a:t>
-            </a:r>
-            <a:endParaRPr lang="en-US" sz="1200" dirty="0"/>
-          </a:p>
-        </p:txBody>
-      </p:sp>
-      <p:sp>
-        <p:nvSpPr>
-          <p:cNvPr id="8" name="Text 6"/>
-          <p:cNvSpPr/>
-          <p:nvPr/>
-        </p:nvSpPr>
-        <p:spPr>
-          <a:xfrm>
-            <a:off x="406301" y="2643188"/>
-            <a:ext cx="8498026" cy="426541"/>
-          </a:xfrm>
-          <a:prstGeom prst="rect">
-            <a:avLst/>
-          </a:prstGeom>
-          <a:noFill/>
-          <a:ln/>
-        </p:spPr>
-        <p:txBody>
-          <a:bodyPr wrap="square" lIns="0" tIns="0" rIns="0" bIns="0" rtlCol="0" anchor="t"/>
-          <a:lstStyle/>
-          <a:p>
-            <a:pPr algn="l" indent="0" marL="0">
-              <a:lnSpc>
-                <a:spcPts val="1680"/>
-              </a:lnSpc>
-              <a:spcBef>
-                <a:spcPts val="300"/>
-              </a:spcBef>
-              <a:spcAft>
-                <a:spcPts val="300"/>
-              </a:spcAft>
-              <a:buNone/>
-            </a:pPr>
-            <a:r>
-              <a:rPr lang="en-US" sz="1200" dirty="0">
-                <a:solidFill>
-                  <a:srgbClr val="1C2833"/>
-                </a:solidFill>
-                <a:latin typeface="Arial" pitchFamily="34" charset="0"/>
-                <a:ea typeface="Arial" pitchFamily="34" charset="-122"/>
-                <a:cs typeface="Arial" pitchFamily="34" charset="-120"/>
-              </a:rPr>
-              <a:t>– Poster (A2 or larger)    – Slide deck (5–8 slides, projected)    – 90-second video    – 1-page printed story / explainer    – Live demonstration with the torch and ball    – Infographic / data visualisation</a:t>
-            </a:r>
-            <a:endParaRPr lang="en-US" sz="1200" dirty="0"/>
-          </a:p>
-        </p:txBody>
-      </p:sp>
-      <p:sp>
-        <p:nvSpPr>
-          <p:cNvPr id="9" name="Text 7"/>
-          <p:cNvSpPr/>
-          <p:nvPr/>
-        </p:nvSpPr>
-        <p:spPr>
-          <a:xfrm>
-            <a:off x="634901" y="3158579"/>
-            <a:ext cx="8102798" cy="487561"/>
-          </a:xfrm>
-          <a:prstGeom prst="rect">
-            <a:avLst/>
-          </a:prstGeom>
-          <a:noFill/>
-          <a:ln/>
-        </p:spPr>
-        <p:txBody>
-          <a:bodyPr wrap="square" lIns="0" tIns="0" rIns="0" bIns="0" rtlCol="0" anchor="t"/>
-          <a:lstStyle/>
-          <a:p>
-            <a:pPr algn="l" marL="342900" indent="-342900">
-              <a:lnSpc>
-                <a:spcPts val="1620"/>
-              </a:lnSpc>
-              <a:spcAft>
-                <a:spcPts val="300"/>
-              </a:spcAft>
-              <a:buSzPct val="100000"/>
-              <a:buChar char="•"/>
-            </a:pPr>
-            <a:r>
-              <a:rPr lang="en-US" sz="1200" b="1" dirty="0">
-                <a:solidFill>
-                  <a:srgbClr val="1C2833"/>
-                </a:solidFill>
-                <a:latin typeface="Arial" pitchFamily="34" charset="0"/>
-                <a:ea typeface="Arial" pitchFamily="34" charset="-122"/>
-                <a:cs typeface="Arial" pitchFamily="34" charset="-120"/>
-              </a:rPr>
-              <a:t>One source named</a:t>
-            </a:r>
-            <a:pPr algn="l" indent="0" marL="0">
-              <a:lnSpc>
-                <a:spcPts val="1620"/>
-              </a:lnSpc>
-              <a:spcAft>
-                <a:spcPts val="300"/>
-              </a:spcAft>
-              <a:buNone/>
-            </a:pPr>
-            <a:r>
-              <a:rPr lang="en-US" sz="1200" dirty="0">
-                <a:solidFill>
-                  <a:srgbClr val="1C2833"/>
-                </a:solidFill>
-                <a:latin typeface="Arial" pitchFamily="34" charset="0"/>
-                <a:ea typeface="Arial" pitchFamily="34" charset="-122"/>
-                <a:cs typeface="Arial" pitchFamily="34" charset="-120"/>
-              </a:rPr>
-              <a:t> — </a:t>
-            </a:r>
-            <a:pPr algn="l" indent="0" marL="0">
-              <a:lnSpc>
-                <a:spcPts val="1620"/>
-              </a:lnSpc>
-              <a:spcAft>
-                <a:spcPts val="300"/>
-              </a:spcAft>
-              <a:buNone/>
-            </a:pPr>
-            <a:r>
-              <a:rPr lang="en-US" sz="1200" i="1" dirty="0">
-                <a:solidFill>
-                  <a:srgbClr val="1C2833"/>
-                </a:solidFill>
-                <a:latin typeface="Arial" pitchFamily="34" charset="0"/>
-                <a:ea typeface="Arial" pitchFamily="34" charset="-122"/>
-                <a:cs typeface="Arial" pitchFamily="34" charset="-120"/>
-              </a:rPr>
-              <a:t>Sūrya-siddhānta</a:t>
-            </a:r>
-            <a:pPr algn="l" indent="0" marL="0">
-              <a:lnSpc>
-                <a:spcPts val="1620"/>
-              </a:lnSpc>
-              <a:spcAft>
-                <a:spcPts val="300"/>
-              </a:spcAft>
-              <a:buNone/>
-            </a:pPr>
-            <a:r>
-              <a:rPr lang="en-US" sz="1200" dirty="0">
-                <a:solidFill>
-                  <a:srgbClr val="1C2833"/>
-                </a:solidFill>
-                <a:latin typeface="Arial" pitchFamily="34" charset="0"/>
-                <a:ea typeface="Arial" pitchFamily="34" charset="-122"/>
-                <a:cs typeface="Arial" pitchFamily="34" charset="-120"/>
-              </a:rPr>
-              <a:t> (paraphrased), NCERT Physics XI, NASA's phase calendar, the class </a:t>
-            </a:r>
-            <a:pPr algn="l" indent="0" marL="0">
-              <a:lnSpc>
-                <a:spcPts val="1620"/>
-              </a:lnSpc>
-              <a:spcAft>
-                <a:spcPts val="300"/>
-              </a:spcAft>
-              <a:buNone/>
-            </a:pPr>
-            <a:r>
-              <a:rPr lang="en-US" sz="1200" i="1" dirty="0">
-                <a:solidFill>
-                  <a:srgbClr val="1C2833"/>
-                </a:solidFill>
-                <a:latin typeface="Arial" pitchFamily="34" charset="0"/>
-                <a:ea typeface="Arial" pitchFamily="34" charset="-122"/>
-                <a:cs typeface="Arial" pitchFamily="34" charset="-120"/>
-              </a:rPr>
-              <a:t>pañcāṅga</a:t>
-            </a:r>
-            <a:pPr algn="l" indent="0" marL="0">
-              <a:lnSpc>
-                <a:spcPts val="1620"/>
-              </a:lnSpc>
-              <a:spcAft>
-                <a:spcPts val="300"/>
-              </a:spcAft>
-              <a:buNone/>
-            </a:pPr>
-            <a:r>
-              <a:rPr lang="en-US" sz="1200" dirty="0">
-                <a:solidFill>
-                  <a:srgbClr val="1C2833"/>
-                </a:solidFill>
-                <a:latin typeface="Arial" pitchFamily="34" charset="0"/>
-                <a:ea typeface="Arial" pitchFamily="34" charset="-122"/>
-                <a:cs typeface="Arial" pitchFamily="34" charset="-120"/>
-              </a:rPr>
-              <a:t>, etc. </a:t>
-            </a:r>
-            <a:pPr algn="l" indent="0" marL="0">
-              <a:lnSpc>
-                <a:spcPts val="1620"/>
-              </a:lnSpc>
-              <a:spcAft>
-                <a:spcPts val="300"/>
-              </a:spcAft>
-              <a:buNone/>
-            </a:pPr>
-            <a:r>
-              <a:rPr lang="en-US" sz="1200" b="1" dirty="0">
-                <a:solidFill>
-                  <a:srgbClr val="1C2833"/>
-                </a:solidFill>
-                <a:latin typeface="Arial" pitchFamily="34" charset="0"/>
-                <a:ea typeface="Arial" pitchFamily="34" charset="-122"/>
-                <a:cs typeface="Arial" pitchFamily="34" charset="-120"/>
-              </a:rPr>
-              <a:t>Real sources only.</a:t>
-            </a:r>
-            <a:endParaRPr lang="en-US" sz="1200" dirty="0"/>
-          </a:p>
-        </p:txBody>
-      </p:sp>
-      <p:sp>
-        <p:nvSpPr>
-          <p:cNvPr id="10" name="Text 8"/>
-          <p:cNvSpPr/>
-          <p:nvPr/>
-        </p:nvSpPr>
-        <p:spPr>
-          <a:xfrm>
-            <a:off x="634901" y="3747641"/>
-            <a:ext cx="8102798" cy="281880"/>
-          </a:xfrm>
-          <a:prstGeom prst="rect">
-            <a:avLst/>
-          </a:prstGeom>
-          <a:noFill/>
-          <a:ln/>
-        </p:spPr>
-        <p:txBody>
-          <a:bodyPr wrap="square" lIns="0" tIns="0" rIns="0" bIns="0" rtlCol="0" anchor="t"/>
-          <a:lstStyle/>
-          <a:p>
-            <a:pPr algn="l" marL="342900" indent="-342900">
-              <a:lnSpc>
-                <a:spcPts val="1620"/>
-              </a:lnSpc>
-              <a:spcAft>
-                <a:spcPts val="300"/>
-              </a:spcAft>
-              <a:buSzPct val="100000"/>
-              <a:buChar char="•"/>
-            </a:pPr>
-            <a:r>
-              <a:rPr lang="en-US" sz="1200" b="1" dirty="0">
-                <a:solidFill>
-                  <a:srgbClr val="1C2833"/>
-                </a:solidFill>
-                <a:latin typeface="Arial" pitchFamily="34" charset="0"/>
-                <a:ea typeface="Arial" pitchFamily="34" charset="-122"/>
-                <a:cs typeface="Arial" pitchFamily="34" charset="-120"/>
-              </a:rPr>
-              <a:t>By end of class:</a:t>
-            </a:r>
-            <a:pPr algn="l" indent="0" marL="0">
-              <a:lnSpc>
-                <a:spcPts val="1620"/>
-              </a:lnSpc>
-              <a:spcAft>
-                <a:spcPts val="300"/>
-              </a:spcAft>
-              <a:buNone/>
-            </a:pPr>
-            <a:r>
-              <a:rPr lang="en-US" sz="1200" dirty="0">
-                <a:solidFill>
-                  <a:srgbClr val="1C2833"/>
-                </a:solidFill>
-                <a:latin typeface="Arial" pitchFamily="34" charset="0"/>
-                <a:ea typeface="Arial" pitchFamily="34" charset="-122"/>
-                <a:cs typeface="Arial" pitchFamily="34" charset="-120"/>
-              </a:rPr>
-              <a:t> a one-paragraph plan + a first-draft artefact (a poster sketch, video storyboard, slide outline).</a:t>
-            </a:r>
-            <a:endParaRPr lang="en-US" sz="1200" dirty="0"/>
-          </a:p>
-        </p:txBody>
-      </p:sp>
-      <p:sp>
-        <p:nvSpPr>
-          <p:cNvPr id="11" name="Text 9"/>
-          <p:cNvSpPr/>
-          <p:nvPr/>
-        </p:nvSpPr>
-        <p:spPr>
-          <a:xfrm>
-            <a:off x="406301" y="4118372"/>
-            <a:ext cx="8498026" cy="639812"/>
-          </a:xfrm>
-          <a:prstGeom prst="rect">
-            <a:avLst/>
-          </a:prstGeom>
-          <a:noFill/>
-          <a:ln/>
-        </p:spPr>
-        <p:txBody>
-          <a:bodyPr wrap="square" lIns="0" tIns="0" rIns="0" bIns="0" rtlCol="0" anchor="t"/>
-          <a:lstStyle/>
-          <a:p>
-            <a:pPr algn="l" indent="0" marL="0">
-              <a:lnSpc>
-                <a:spcPts val="1680"/>
-              </a:lnSpc>
-              <a:spcBef>
-                <a:spcPts val="300"/>
-              </a:spcBef>
-              <a:spcAft>
-                <a:spcPts val="300"/>
-              </a:spcAft>
-              <a:buNone/>
-            </a:pPr>
-            <a:r>
-              <a:rPr lang="en-US" sz="1200" dirty="0">
-                <a:solidFill>
-                  <a:srgbClr val="1C2833"/>
-                </a:solidFill>
-                <a:latin typeface="Arial" pitchFamily="34" charset="0"/>
-                <a:ea typeface="Arial" pitchFamily="34" charset="-122"/>
-                <a:cs typeface="Arial" pitchFamily="34" charset="-120"/>
-              </a:rPr>
-              <a:t>The teacher intervenes if: – A pair is still debating topic at minute 15 — give them 5 minutes, then assign. – A pair's source is invented or unverifiable — flag it; help them swap. – A pair has split unequally — re-balance the workload before they leave.</a:t>
-            </a:r>
-            <a:endParaRPr lang="en-US" sz="1200" dirty="0"/>
-          </a:p>
-        </p:txBody>
-      </p:sp>
-      <p:sp>
-        <p:nvSpPr>
-          <p:cNvPr id="12" name="Text 10"/>
-          <p:cNvSpPr/>
-          <p:nvPr/>
-        </p:nvSpPr>
-        <p:spPr>
-          <a:xfrm>
-            <a:off x="406301" y="4910584"/>
+            <a:off x="406301" y="4434929"/>
             <a:ext cx="8498026" cy="213271"/>
           </a:xfrm>
           <a:prstGeom prst="rect">
@@ -4997,7 +6955,7 @@
                 <a:ea typeface="Georgia" pitchFamily="34" charset="-122"/>
                 <a:cs typeface="Georgia" pitchFamily="34" charset="-120"/>
               </a:rPr>
-              <a:t>Wrap-up (5 min)</a:t>
+              <a:t>Core (5 min) (cont.)</a:t>
             </a:r>
             <a:endParaRPr lang="en-US" sz="1800" dirty="0"/>
           </a:p>
@@ -5011,8 +6969,8 @@
         </p:nvSpPr>
         <p:spPr>
           <a:xfrm>
-            <a:off x="406301" y="870942"/>
-            <a:ext cx="8498026" cy="213271"/>
+            <a:off x="634901" y="883593"/>
+            <a:ext cx="8102798" cy="1386483"/>
           </a:xfrm>
           <a:prstGeom prst="rect">
             <a:avLst/>
@@ -5024,54 +6982,6 @@
           <a:bodyPr wrap="square" lIns="0" tIns="0" rIns="0" bIns="0" rtlCol="0" anchor="t"/>
           <a:lstStyle/>
           <a:p>
-            <a:pPr algn="l" indent="0" marL="0">
-              <a:lnSpc>
-                <a:spcPts val="1680"/>
-              </a:lnSpc>
-              <a:spcBef>
-                <a:spcPts val="300"/>
-              </a:spcBef>
-              <a:spcAft>
-                <a:spcPts val="300"/>
-              </a:spcAft>
-              <a:buNone/>
-            </a:pPr>
-            <a:r>
-              <a:rPr lang="en-US" sz="1200" dirty="0">
-                <a:solidFill>
-                  <a:srgbClr val="1C2833"/>
-                </a:solidFill>
-                <a:latin typeface="Arial" pitchFamily="34" charset="0"/>
-                <a:ea typeface="Arial" pitchFamily="34" charset="-122"/>
-                <a:cs typeface="Arial" pitchFamily="34" charset="-120"/>
-              </a:rPr>
-              <a:t>– Each pair submits their plan paragraph + first-draft artefact (phone photo accepted).</a:t>
-            </a:r>
-            <a:endParaRPr lang="en-US" sz="1200" dirty="0"/>
-          </a:p>
-        </p:txBody>
-      </p:sp>
-      <p:sp>
-        <p:nvSpPr>
-          <p:cNvPr id="5" name="Text 3"/>
-          <p:cNvSpPr/>
-          <p:nvPr/>
-        </p:nvSpPr>
-        <p:spPr>
-          <a:xfrm>
-            <a:off x="634901" y="1173063"/>
-            <a:ext cx="8102798" cy="487561"/>
-          </a:xfrm>
-          <a:prstGeom prst="rect">
-            <a:avLst/>
-          </a:prstGeom>
-          <a:noFill/>
-          <a:ln/>
-        </p:spPr>
-        <p:txBody>
-          <a:bodyPr wrap="square" lIns="0" tIns="0" rIns="0" bIns="0" rtlCol="0" anchor="t"/>
-          <a:lstStyle/>
-          <a:p>
             <a:pPr algn="l" marL="342900" indent="-342900">
               <a:lnSpc>
                 <a:spcPts val="1620"/>
@@ -5083,15 +6993,15 @@
               <a:buChar char="•"/>
             </a:pPr>
             <a:r>
-              <a:rPr lang="en-US" sz="1200" b="1" dirty="0">
-                <a:solidFill>
-                  <a:srgbClr val="1C2833"/>
-                </a:solidFill>
-                <a:latin typeface="Arial" pitchFamily="34" charset="0"/>
-                <a:ea typeface="Arial" pitchFamily="34" charset="-122"/>
-                <a:cs typeface="Arial" pitchFamily="34" charset="-120"/>
-              </a:rPr>
-              <a:t>Tomorrow:</a:t>
+              <a:rPr lang="en-US" sz="1200" i="1" dirty="0">
+                <a:solidFill>
+                  <a:srgbClr val="1C2833"/>
+                </a:solidFill>
+                <a:latin typeface="Arial" pitchFamily="34" charset="0"/>
+                <a:ea typeface="Arial" pitchFamily="34" charset="-122"/>
+                <a:cs typeface="Arial" pitchFamily="34" charset="-120"/>
+              </a:rPr>
+              <a:t>"Do we need to quote a verse?"</a:t>
             </a:r>
             <a:pPr algn="l" indent="0" marL="0">
               <a:lnSpc>
@@ -5111,15 +7021,143 @@
                 <a:ea typeface="Arial" pitchFamily="34" charset="-122"/>
                 <a:cs typeface="Arial" pitchFamily="34" charset="-120"/>
               </a:rPr>
-              <a:t> finish the build. The cross-cultural calendar lesson runs in parallel — 15 min content, then 30 min build time. Be ready.</a:t>
+              <a:t> — No. A paraphrase of the </a:t>
+            </a:r>
+            <a:pPr algn="l" indent="0" marL="0">
+              <a:lnSpc>
+                <a:spcPts val="1620"/>
+              </a:lnSpc>
+              <a:spcAft>
+                <a:spcPts val="300"/>
+              </a:spcAft>
+              <a:buNone/>
+            </a:pPr>
+            <a:r>
+              <a:rPr lang="en-US" sz="1200" i="1" dirty="0">
+                <a:solidFill>
+                  <a:srgbClr val="1C2833"/>
+                </a:solidFill>
+                <a:latin typeface="Arial" pitchFamily="34" charset="0"/>
+                <a:ea typeface="Arial" pitchFamily="34" charset="-122"/>
+                <a:cs typeface="Arial" pitchFamily="34" charset="-120"/>
+              </a:rPr>
+              <a:t>Sūrya-siddhānta</a:t>
+            </a:r>
+            <a:pPr algn="l" indent="0" marL="0">
+              <a:lnSpc>
+                <a:spcPts val="1620"/>
+              </a:lnSpc>
+              <a:spcAft>
+                <a:spcPts val="300"/>
+              </a:spcAft>
+              <a:buNone/>
+            </a:pPr>
+            <a:r>
+              <a:rPr lang="en-US" sz="1200" dirty="0">
+                <a:solidFill>
+                  <a:srgbClr val="1C2833"/>
+                </a:solidFill>
+                <a:latin typeface="Arial" pitchFamily="34" charset="0"/>
+                <a:ea typeface="Arial" pitchFamily="34" charset="-122"/>
+                <a:cs typeface="Arial" pitchFamily="34" charset="-120"/>
+              </a:rPr>
+              <a:t> (e.g. "the Sūrya-siddhānta defines a tithi as 12° of elongation") is enough. A NASA reference is also acceptable. The rubric cares that your source is real and named.</a:t>
             </a:r>
             <a:endParaRPr lang="en-US" sz="1200" dirty="0"/>
           </a:p>
-        </p:txBody>
-      </p:sp>
-      <p:sp>
-        <p:nvSpPr>
-          <p:cNvPr id="6" name="Text 4"/>
+          <a:p>
+            <a:pPr algn="l" marL="342900" indent="-342900">
+              <a:lnSpc>
+                <a:spcPts val="1620"/>
+              </a:lnSpc>
+              <a:spcAft>
+                <a:spcPts val="300"/>
+              </a:spcAft>
+              <a:buSzPct val="100000"/>
+              <a:buChar char="•"/>
+            </a:pPr>
+            <a:r>
+              <a:rPr lang="en-US" sz="1200" i="1" dirty="0">
+                <a:solidFill>
+                  <a:srgbClr val="1C2833"/>
+                </a:solidFill>
+                <a:latin typeface="Arial" pitchFamily="34" charset="0"/>
+                <a:ea typeface="Arial" pitchFamily="34" charset="-122"/>
+                <a:cs typeface="Arial" pitchFamily="34" charset="-120"/>
+              </a:rPr>
+              <a:t>"Can we do TWO topics?"</a:t>
+            </a:r>
+            <a:pPr algn="l" indent="0" marL="0">
+              <a:lnSpc>
+                <a:spcPts val="1620"/>
+              </a:lnSpc>
+              <a:spcAft>
+                <a:spcPts val="300"/>
+              </a:spcAft>
+              <a:buNone/>
+            </a:pPr>
+            <a:r>
+              <a:rPr lang="en-US" sz="1200" dirty="0">
+                <a:solidFill>
+                  <a:srgbClr val="1C2833"/>
+                </a:solidFill>
+                <a:latin typeface="Arial" pitchFamily="34" charset="0"/>
+                <a:ea typeface="Arial" pitchFamily="34" charset="-122"/>
+                <a:cs typeface="Arial" pitchFamily="34" charset="-120"/>
+              </a:rPr>
+              <a:t> — One main topic. You may compare to a second briefly.</a:t>
+            </a:r>
+            <a:endParaRPr lang="en-US" sz="1200" dirty="0"/>
+          </a:p>
+          <a:p>
+            <a:pPr algn="l" marL="342900" indent="-342900">
+              <a:lnSpc>
+                <a:spcPts val="1620"/>
+              </a:lnSpc>
+              <a:spcAft>
+                <a:spcPts val="300"/>
+              </a:spcAft>
+              <a:buSzPct val="100000"/>
+              <a:buChar char="•"/>
+            </a:pPr>
+            <a:r>
+              <a:rPr lang="en-US" sz="1200" i="1" dirty="0">
+                <a:solidFill>
+                  <a:srgbClr val="1C2833"/>
+                </a:solidFill>
+                <a:latin typeface="Arial" pitchFamily="34" charset="0"/>
+                <a:ea typeface="Arial" pitchFamily="34" charset="-122"/>
+                <a:cs typeface="Arial" pitchFamily="34" charset="-120"/>
+              </a:rPr>
+              <a:t>"What if our diary is missing some nights (clouds)?"</a:t>
+            </a:r>
+            <a:pPr algn="l" indent="0" marL="0">
+              <a:lnSpc>
+                <a:spcPts val="1620"/>
+              </a:lnSpc>
+              <a:spcAft>
+                <a:spcPts val="300"/>
+              </a:spcAft>
+              <a:buNone/>
+            </a:pPr>
+            <a:r>
+              <a:rPr lang="en-US" sz="1200" dirty="0">
+                <a:solidFill>
+                  <a:srgbClr val="1C2833"/>
+                </a:solidFill>
+                <a:latin typeface="Arial" pitchFamily="34" charset="0"/>
+                <a:ea typeface="Arial" pitchFamily="34" charset="-122"/>
+                <a:cs typeface="Arial" pitchFamily="34" charset="-120"/>
+              </a:rPr>
+              <a:t> — Note "cloudy, predicted [shape]" for those nights. The diary still counts.</a:t>
+            </a:r>
+            <a:endParaRPr lang="en-US" sz="1200" dirty="0"/>
+          </a:p>
+        </p:txBody>
+      </p:sp>
+      <p:sp>
+        <p:nvSpPr>
+          <p:cNvPr id="5" name="Text 3"/>
           <p:cNvSpPr/>
           <p:nvPr/>
         </p:nvSpPr>
@@ -5269,7 +7307,7 @@
                 <a:ea typeface="Georgia" pitchFamily="34" charset="-122"/>
                 <a:cs typeface="Georgia" pitchFamily="34" charset="-120"/>
               </a:rPr>
-              <a:t>Student-facing content</a:t>
+              <a:t>Activity (30 min) — Build</a:t>
             </a:r>
             <a:endParaRPr lang="en-US" sz="1800" dirty="0"/>
           </a:p>
@@ -5283,61 +7321,8 @@
         </p:nvSpPr>
         <p:spPr>
           <a:xfrm>
-            <a:off x="406301" y="883593"/>
-            <a:ext cx="8331398" cy="1381125"/>
-          </a:xfrm>
-          <a:prstGeom prst="rect">
-            <a:avLst/>
-          </a:prstGeom>
-          <a:solidFill>
-            <a:srgbClr val="F4F8F9"/>
-          </a:solidFill>
-          <a:ln/>
-        </p:spPr>
-        <p:txBody>
-          <a:bodyPr wrap="square" rtlCol="0" anchor="ctr"/>
-          <a:lstStyle/>
-          <a:p>
-            <a:pPr indent="0" marL="0">
-              <a:buNone/>
-            </a:pPr>
-            <a:endParaRPr lang="en-US" dirty="0"/>
-          </a:p>
-        </p:txBody>
-      </p:sp>
-      <p:sp>
-        <p:nvSpPr>
-          <p:cNvPr id="5" name="Shape 3"/>
-          <p:cNvSpPr/>
-          <p:nvPr/>
-        </p:nvSpPr>
-        <p:spPr>
-          <a:xfrm>
-            <a:off x="434876" y="883593"/>
-            <a:ext cx="0" cy="1381125"/>
-          </a:xfrm>
-          <a:prstGeom prst="line">
-            <a:avLst/>
-          </a:prstGeom>
-          <a:noFill/>
-          <a:ln w="57150">
-            <a:solidFill>
-              <a:srgbClr val="FE4447"/>
-            </a:solidFill>
-            <a:prstDash val="solid"/>
-          </a:ln>
-        </p:spPr>
-      </p:sp>
-      <p:sp>
-        <p:nvSpPr>
-          <p:cNvPr id="6" name="Text 4"/>
-          <p:cNvSpPr/>
-          <p:nvPr/>
-        </p:nvSpPr>
-        <p:spPr>
-          <a:xfrm>
-            <a:off x="692051" y="1074093"/>
-            <a:ext cx="7973389" cy="230981"/>
+            <a:off x="406301" y="870942"/>
+            <a:ext cx="8498026" cy="213271"/>
           </a:xfrm>
           <a:prstGeom prst="rect">
             <a:avLst/>
@@ -5351,7 +7336,7 @@
           <a:p>
             <a:pPr algn="l" indent="0" marL="0">
               <a:lnSpc>
-                <a:spcPts val="1820"/>
+                <a:spcPts val="1680"/>
               </a:lnSpc>
               <a:spcBef>
                 <a:spcPts val="300"/>
@@ -5362,119 +7347,23 @@
               <a:buNone/>
             </a:pPr>
             <a:r>
-              <a:rPr lang="en-US" sz="1300" b="1" i="1" dirty="0">
-                <a:solidFill>
-                  <a:srgbClr val="1C2833"/>
-                </a:solidFill>
-                <a:latin typeface="Georgia" pitchFamily="34" charset="0"/>
-                <a:ea typeface="Georgia" pitchFamily="34" charset="-122"/>
-                <a:cs typeface="Georgia" pitchFamily="34" charset="-120"/>
-              </a:rPr>
-              <a:t>Today is build day.</a:t>
-            </a:r>
-            <a:endParaRPr lang="en-US" sz="1300" dirty="0"/>
-          </a:p>
-        </p:txBody>
-      </p:sp>
-      <p:sp>
-        <p:nvSpPr>
-          <p:cNvPr id="7" name="Text 5"/>
-          <p:cNvSpPr/>
-          <p:nvPr/>
-        </p:nvSpPr>
-        <p:spPr>
-          <a:xfrm>
-            <a:off x="692051" y="1343174"/>
-            <a:ext cx="7973389" cy="461963"/>
-          </a:xfrm>
-          <a:prstGeom prst="rect">
-            <a:avLst/>
-          </a:prstGeom>
-          <a:noFill/>
-          <a:ln/>
-        </p:spPr>
-        <p:txBody>
-          <a:bodyPr wrap="square" lIns="0" tIns="0" rIns="0" bIns="0" rtlCol="0" anchor="t"/>
-          <a:lstStyle/>
-          <a:p>
-            <a:pPr algn="l" indent="0" marL="0">
-              <a:lnSpc>
-                <a:spcPts val="1820"/>
-              </a:lnSpc>
-              <a:spcBef>
-                <a:spcPts val="300"/>
-              </a:spcBef>
-              <a:spcAft>
-                <a:spcPts val="300"/>
-              </a:spcAft>
-              <a:buNone/>
-            </a:pPr>
-            <a:r>
-              <a:rPr lang="en-US" sz="1300" i="1" dirty="0">
-                <a:solidFill>
-                  <a:srgbClr val="1C2833"/>
-                </a:solidFill>
-                <a:latin typeface="Georgia" pitchFamily="34" charset="0"/>
-                <a:ea typeface="Georgia" pitchFamily="34" charset="-122"/>
-                <a:cs typeface="Georgia" pitchFamily="34" charset="-120"/>
-              </a:rPr>
-              <a:t>By the end of this class, your pair (or you, if solo) should have: - A one-paragraph plan in writing. - A first-draft artefact — poster sketch, slide outline, video storyboard. - Your source named, on the artefact.</a:t>
-            </a:r>
-            <a:endParaRPr lang="en-US" sz="1300" dirty="0"/>
-          </a:p>
-        </p:txBody>
-      </p:sp>
-      <p:sp>
-        <p:nvSpPr>
-          <p:cNvPr id="8" name="Text 6"/>
-          <p:cNvSpPr/>
-          <p:nvPr/>
-        </p:nvSpPr>
-        <p:spPr>
-          <a:xfrm>
-            <a:off x="692051" y="1843236"/>
-            <a:ext cx="7973389" cy="230981"/>
-          </a:xfrm>
-          <a:prstGeom prst="rect">
-            <a:avLst/>
-          </a:prstGeom>
-          <a:noFill/>
-          <a:ln/>
-        </p:spPr>
-        <p:txBody>
-          <a:bodyPr wrap="square" lIns="0" tIns="0" rIns="0" bIns="0" rtlCol="0" anchor="t"/>
-          <a:lstStyle/>
-          <a:p>
-            <a:pPr algn="l" indent="0" marL="0">
-              <a:lnSpc>
-                <a:spcPts val="1820"/>
-              </a:lnSpc>
-              <a:spcBef>
-                <a:spcPts val="300"/>
-              </a:spcBef>
-              <a:spcAft>
-                <a:spcPts val="300"/>
-              </a:spcAft>
-              <a:buNone/>
-            </a:pPr>
-            <a:r>
-              <a:rPr lang="en-US" sz="1300" i="1" dirty="0">
-                <a:solidFill>
-                  <a:srgbClr val="1C2833"/>
-                </a:solidFill>
-                <a:latin typeface="Georgia" pitchFamily="34" charset="0"/>
-                <a:ea typeface="Georgia" pitchFamily="34" charset="-122"/>
-                <a:cs typeface="Georgia" pitchFamily="34" charset="-120"/>
-              </a:rPr>
-              <a:t>Tomorrow you refine. Day 10 you present.</a:t>
-            </a:r>
-            <a:endParaRPr lang="en-US" sz="1300" dirty="0"/>
-          </a:p>
-        </p:txBody>
-      </p:sp>
-      <p:sp>
-        <p:nvSpPr>
-          <p:cNvPr id="9" name="Text 7"/>
+              <a:rPr lang="en-US" sz="1200" dirty="0">
+                <a:solidFill>
+                  <a:srgbClr val="1C2833"/>
+                </a:solidFill>
+                <a:latin typeface="Arial" pitchFamily="34" charset="0"/>
+                <a:ea typeface="Arial" pitchFamily="34" charset="-122"/>
+                <a:cs typeface="Arial" pitchFamily="34" charset="-120"/>
+              </a:rPr>
+              <a:t>Pairs work on their projects. The teacher rotates and checks each pair has:</a:t>
+            </a:r>
+            <a:endParaRPr lang="en-US" sz="1200" dirty="0"/>
+          </a:p>
+        </p:txBody>
+      </p:sp>
+      <p:sp>
+        <p:nvSpPr>
+          <p:cNvPr id="5" name="Text 3"/>
           <p:cNvSpPr/>
           <p:nvPr/>
         </p:nvSpPr>
@@ -5624,7 +7513,7 @@
                 <a:ea typeface="Georgia" pitchFamily="34" charset="-122"/>
                 <a:cs typeface="Georgia" pitchFamily="34" charset="-120"/>
               </a:rPr>
-              <a:t>Homework</a:t>
+              <a:t>Activity (30 min) — Build (cont.)</a:t>
             </a:r>
             <a:endParaRPr lang="en-US" sz="1800" dirty="0"/>
           </a:p>
@@ -5638,8 +7527,8 @@
         </p:nvSpPr>
         <p:spPr>
           <a:xfrm>
-            <a:off x="406301" y="870942"/>
-            <a:ext cx="8498026" cy="426541"/>
+            <a:off x="634901" y="883593"/>
+            <a:ext cx="8102798" cy="281880"/>
           </a:xfrm>
           <a:prstGeom prst="rect">
             <a:avLst/>
@@ -5651,13 +7540,31 @@
           <a:bodyPr wrap="square" lIns="0" tIns="0" rIns="0" bIns="0" rtlCol="0" anchor="t"/>
           <a:lstStyle/>
           <a:p>
-            <a:pPr algn="l" indent="0" marL="0">
-              <a:lnSpc>
-                <a:spcPts val="1680"/>
-              </a:lnSpc>
-              <a:spcBef>
-                <a:spcPts val="300"/>
-              </a:spcBef>
+            <a:pPr algn="l" marL="342900" indent="-342900">
+              <a:lnSpc>
+                <a:spcPts val="1620"/>
+              </a:lnSpc>
+              <a:spcAft>
+                <a:spcPts val="300"/>
+              </a:spcAft>
+              <a:buSzPct val="100000"/>
+              <a:buChar char="•"/>
+            </a:pPr>
+            <a:r>
+              <a:rPr lang="en-US" sz="1200" b="1" dirty="0">
+                <a:solidFill>
+                  <a:srgbClr val="1C2833"/>
+                </a:solidFill>
+                <a:latin typeface="Arial" pitchFamily="34" charset="0"/>
+                <a:ea typeface="Arial" pitchFamily="34" charset="-122"/>
+                <a:cs typeface="Arial" pitchFamily="34" charset="-120"/>
+              </a:rPr>
+              <a:t>Chosen topic</a:t>
+            </a:r>
+            <a:pPr algn="l" indent="0" marL="0">
+              <a:lnSpc>
+                <a:spcPts val="1620"/>
+              </a:lnSpc>
               <a:spcAft>
                 <a:spcPts val="300"/>
               </a:spcAft>
@@ -5672,42 +7579,42 @@
                 <a:ea typeface="Arial" pitchFamily="34" charset="-122"/>
                 <a:cs typeface="Arial" pitchFamily="34" charset="-120"/>
               </a:rPr>
-              <a:t>– Continue the Moon diary (you have 2 nights left). – Finish at home what you couldn't finish in class. Don't </a:t>
-            </a:r>
-            <a:pPr algn="l" indent="0" marL="0">
-              <a:lnSpc>
-                <a:spcPts val="1680"/>
-              </a:lnSpc>
-              <a:spcBef>
-                <a:spcPts val="300"/>
-              </a:spcBef>
-              <a:spcAft>
-                <a:spcPts val="300"/>
-              </a:spcAft>
-              <a:buNone/>
-            </a:pPr>
-            <a:r>
-              <a:rPr lang="en-US" sz="1200" i="1" dirty="0">
-                <a:solidFill>
-                  <a:srgbClr val="1C2833"/>
-                </a:solidFill>
-                <a:latin typeface="Arial" pitchFamily="34" charset="0"/>
-                <a:ea typeface="Arial" pitchFamily="34" charset="-122"/>
-                <a:cs typeface="Arial" pitchFamily="34" charset="-120"/>
-              </a:rPr>
-              <a:t>start</a:t>
-            </a:r>
-            <a:pPr algn="l" indent="0" marL="0">
-              <a:lnSpc>
-                <a:spcPts val="1680"/>
-              </a:lnSpc>
-              <a:spcBef>
-                <a:spcPts val="300"/>
-              </a:spcBef>
-              <a:spcAft>
-                <a:spcPts val="300"/>
-              </a:spcAft>
-              <a:buNone/>
+              <a:t> — one of:</a:t>
+            </a:r>
+            <a:endParaRPr lang="en-US" sz="1200" dirty="0"/>
+          </a:p>
+        </p:txBody>
+      </p:sp>
+      <p:sp>
+        <p:nvSpPr>
+          <p:cNvPr id="5" name="Text 3"/>
+          <p:cNvSpPr/>
+          <p:nvPr/>
+        </p:nvSpPr>
+        <p:spPr>
+          <a:xfrm>
+            <a:off x="634901" y="1266974"/>
+            <a:ext cx="8102798" cy="1500783"/>
+          </a:xfrm>
+          <a:prstGeom prst="rect">
+            <a:avLst/>
+          </a:prstGeom>
+          <a:noFill/>
+          <a:ln/>
+        </p:spPr>
+        <p:txBody>
+          <a:bodyPr wrap="square" lIns="0" tIns="0" rIns="0" bIns="0" rtlCol="0" anchor="t"/>
+          <a:lstStyle/>
+          <a:p>
+            <a:pPr algn="l" marL="342900" indent="-342900">
+              <a:lnSpc>
+                <a:spcPts val="1620"/>
+              </a:lnSpc>
+              <a:spcAft>
+                <a:spcPts val="300"/>
+              </a:spcAft>
+              <a:buSzPct val="100000"/>
+              <a:buChar char="•"/>
             </a:pPr>
             <a:r>
               <a:rPr lang="en-US" sz="1200" dirty="0">
@@ -5718,15 +7625,135 @@
                 <a:ea typeface="Arial" pitchFamily="34" charset="-122"/>
                 <a:cs typeface="Arial" pitchFamily="34" charset="-120"/>
               </a:rPr>
-              <a:t> something new — refine.</a:t>
+              <a:t>Moon phases (geometry and the 10-night diary visualised)</a:t>
             </a:r>
             <a:endParaRPr lang="en-US" sz="1200" dirty="0"/>
           </a:p>
-        </p:txBody>
-      </p:sp>
-      <p:sp>
-        <p:nvSpPr>
-          <p:cNvPr id="5" name="Text 3"/>
+          <a:p>
+            <a:pPr algn="l" marL="342900" indent="-342900">
+              <a:lnSpc>
+                <a:spcPts val="1620"/>
+              </a:lnSpc>
+              <a:spcAft>
+                <a:spcPts val="300"/>
+              </a:spcAft>
+              <a:buSzPct val="100000"/>
+              <a:buChar char="•"/>
+            </a:pPr>
+            <a:r>
+              <a:rPr lang="en-US" sz="1200" dirty="0">
+                <a:solidFill>
+                  <a:srgbClr val="1C2833"/>
+                </a:solidFill>
+                <a:latin typeface="Arial" pitchFamily="34" charset="0"/>
+                <a:ea typeface="Arial" pitchFamily="34" charset="-122"/>
+                <a:cs typeface="Arial" pitchFamily="34" charset="-120"/>
+              </a:rPr>
+              <a:t>Eclipses (why, when, safety)</a:t>
+            </a:r>
+            <a:endParaRPr lang="en-US" sz="1200" dirty="0"/>
+          </a:p>
+          <a:p>
+            <a:pPr algn="l" marL="342900" indent="-342900">
+              <a:lnSpc>
+                <a:spcPts val="1620"/>
+              </a:lnSpc>
+              <a:spcAft>
+                <a:spcPts val="300"/>
+              </a:spcAft>
+              <a:buSzPct val="100000"/>
+              <a:buChar char="•"/>
+            </a:pPr>
+            <a:r>
+              <a:rPr lang="en-US" sz="1200" dirty="0">
+                <a:solidFill>
+                  <a:srgbClr val="1C2833"/>
+                </a:solidFill>
+                <a:latin typeface="Arial" pitchFamily="34" charset="0"/>
+                <a:ea typeface="Arial" pitchFamily="34" charset="-122"/>
+                <a:cs typeface="Arial" pitchFamily="34" charset="-120"/>
+              </a:rPr>
+              <a:t>Tithi calendar (the one built on Day 4 + an explanation)</a:t>
+            </a:r>
+            <a:endParaRPr lang="en-US" sz="1200" dirty="0"/>
+          </a:p>
+          <a:p>
+            <a:pPr algn="l" marL="342900" indent="-342900">
+              <a:lnSpc>
+                <a:spcPts val="1620"/>
+              </a:lnSpc>
+              <a:spcAft>
+                <a:spcPts val="300"/>
+              </a:spcAft>
+              <a:buSzPct val="100000"/>
+              <a:buChar char="•"/>
+            </a:pPr>
+            <a:r>
+              <a:rPr lang="en-US" sz="1200" dirty="0">
+                <a:solidFill>
+                  <a:srgbClr val="1C2833"/>
+                </a:solidFill>
+                <a:latin typeface="Arial" pitchFamily="34" charset="0"/>
+                <a:ea typeface="Arial" pitchFamily="34" charset="-122"/>
+                <a:cs typeface="Arial" pitchFamily="34" charset="-120"/>
+              </a:rPr>
+              <a:t>Cross-cultural lunar calendars (preview of Day 9)</a:t>
+            </a:r>
+            <a:endParaRPr lang="en-US" sz="1200" dirty="0"/>
+          </a:p>
+          <a:p>
+            <a:pPr algn="l" marL="342900" indent="-342900">
+              <a:lnSpc>
+                <a:spcPts val="1620"/>
+              </a:lnSpc>
+              <a:spcAft>
+                <a:spcPts val="300"/>
+              </a:spcAft>
+              <a:buSzPct val="100000"/>
+              <a:buChar char="•"/>
+            </a:pPr>
+            <a:r>
+              <a:rPr lang="en-US" sz="1200" dirty="0">
+                <a:solidFill>
+                  <a:srgbClr val="1C2833"/>
+                </a:solidFill>
+                <a:latin typeface="Arial" pitchFamily="34" charset="0"/>
+                <a:ea typeface="Arial" pitchFamily="34" charset="-122"/>
+                <a:cs typeface="Arial" pitchFamily="34" charset="-120"/>
+              </a:rPr>
+              <a:t>Lunar months and festivals</a:t>
+            </a:r>
+            <a:endParaRPr lang="en-US" sz="1200" dirty="0"/>
+          </a:p>
+          <a:p>
+            <a:pPr algn="l" marL="342900" indent="-342900">
+              <a:lnSpc>
+                <a:spcPts val="1620"/>
+              </a:lnSpc>
+              <a:spcAft>
+                <a:spcPts val="300"/>
+              </a:spcAft>
+              <a:buSzPct val="100000"/>
+              <a:buChar char="•"/>
+            </a:pPr>
+            <a:r>
+              <a:rPr lang="en-US" sz="1200" dirty="0">
+                <a:solidFill>
+                  <a:srgbClr val="1C2833"/>
+                </a:solidFill>
+                <a:latin typeface="Arial" pitchFamily="34" charset="0"/>
+                <a:ea typeface="Arial" pitchFamily="34" charset="-122"/>
+                <a:cs typeface="Arial" pitchFamily="34" charset="-120"/>
+              </a:rPr>
+              <a:t>Adhika māsa (intercalary month)</a:t>
+            </a:r>
+            <a:endParaRPr lang="en-US" sz="1200" dirty="0"/>
+          </a:p>
+        </p:txBody>
+      </p:sp>
+      <p:sp>
+        <p:nvSpPr>
+          <p:cNvPr id="6" name="Text 4"/>
           <p:cNvSpPr/>
           <p:nvPr/>
         </p:nvSpPr>
